--- a/presentation/CTS Presentation Template.pptx
+++ b/presentation/CTS Presentation Template.pptx
@@ -124,7 +124,7 @@
       <c:layout/>
       <c:barChart>
         <c:barDir val="col"/>
-        <c:grouping val="clustered"/>
+        <c:grouping val="stacked"/>
         <c:varyColors val="0"/>
         <c:ser>
           <c:idx val="0"/>
@@ -135,14 +135,14 @@
               <c:strCache>
                 <c:ptCount val="1"/>
                 <c:pt idx="0">
-                  <c:v>Revenue</c:v>
+                  <c:v>Production</c:v>
                 </c:pt>
               </c:strCache>
             </c:strRef>
           </c:tx>
           <c:spPr>
             <a:solidFill>
-              <a:srgbClr val="1F4E79"/>
+              <a:srgbClr val="3FD0C9"/>
             </a:solidFill>
             <a:effectLst/>
           </c:spPr>
@@ -154,17 +154,17 @@
               <a:lstStyle/>
               <a:p>
                 <a:pPr>
-                  <a:defRPr b="0" i="0" strike="noStrike" sz="900" u="none">
+                  <a:defRPr b="0" i="0" strike="noStrike" sz="1200" u="none">
                     <a:solidFill>
-                      <a:srgbClr val="595959"/>
+                      <a:srgbClr val="000000"/>
                     </a:solidFill>
-                    <a:latin typeface="Calibri"/>
+                    <a:latin typeface="Arial"/>
                   </a:defRPr>
                 </a:pPr>
               </a:p>
             </c:txPr>
             <c:showLegendKey val="0"/>
-            <c:showVal val="1"/>
+            <c:showVal val="0"/>
             <c:showCatName val="0"/>
             <c:showSerName val="0"/>
             <c:showPercent val="0"/>
@@ -224,40 +224,314 @@
                 <c:formatCode>General</c:formatCode>
                 <c:ptCount val="12"/>
                 <c:pt idx="0">
-                  <c:v>410</c:v>
+                  <c:v>210</c:v>
                 </c:pt>
                 <c:pt idx="1">
-                  <c:v>425</c:v>
+                  <c:v>225</c:v>
                 </c:pt>
                 <c:pt idx="2">
-                  <c:v>380</c:v>
+                  <c:v>180</c:v>
                 </c:pt>
                 <c:pt idx="3">
+                  <c:v>160</c:v>
+                </c:pt>
+                <c:pt idx="4">
+                  <c:v>240</c:v>
+                </c:pt>
+                <c:pt idx="5">
+                  <c:v>270</c:v>
+                </c:pt>
+                <c:pt idx="6">
+                  <c:v>255</c:v>
+                </c:pt>
+                <c:pt idx="7">
+                  <c:v>290</c:v>
+                </c:pt>
+                <c:pt idx="8">
+                  <c:v>320</c:v>
+                </c:pt>
+                <c:pt idx="9">
+                  <c:v>305</c:v>
+                </c:pt>
+                <c:pt idx="10">
+                  <c:v>330</c:v>
+                </c:pt>
+                <c:pt idx="11">
                   <c:v>360</c:v>
                 </c:pt>
+              </c:numCache>
+            </c:numRef>
+          </c:val>
+        </c:ser>
+        <c:ser>
+          <c:idx val="1"/>
+          <c:order val="1"/>
+          <c:tx>
+            <c:strRef>
+              <c:f>Sheet1!$C$1</c:f>
+              <c:strCache>
+                <c:ptCount val="1"/>
+                <c:pt idx="0">
+                  <c:v>Consulting</c:v>
+                </c:pt>
+              </c:strCache>
+            </c:strRef>
+          </c:tx>
+          <c:spPr>
+            <a:solidFill>
+              <a:srgbClr val="6D71FF"/>
+            </a:solidFill>
+            <a:effectLst/>
+          </c:spPr>
+          <c:invertIfNegative val="0"/>
+          <c:dLbls>
+            <c:numFmt formatCode="#,##0" sourceLinked="0"/>
+            <c:txPr>
+              <a:bodyPr/>
+              <a:lstStyle/>
+              <a:p>
+                <a:pPr>
+                  <a:defRPr b="0" i="0" strike="noStrike" sz="1200" u="none">
+                    <a:solidFill>
+                      <a:srgbClr val="000000"/>
+                    </a:solidFill>
+                    <a:latin typeface="Arial"/>
+                  </a:defRPr>
+                </a:pPr>
+              </a:p>
+            </c:txPr>
+            <c:showLegendKey val="0"/>
+            <c:showVal val="0"/>
+            <c:showCatName val="0"/>
+            <c:showSerName val="0"/>
+            <c:showPercent val="0"/>
+            <c:showBubbleSize val="0"/>
+            <c:showLeaderLines val="0"/>
+          </c:dLbls>
+          <c:cat>
+            <c:multiLvlStrRef>
+              <c:f>Sheet1!$A$2:$A$13</c:f>
+              <c:multiLvlStrCache>
+                <c:ptCount val="12"/>
+                <c:lvl>
+                  <c:pt idx="0">
+                    <c:v>Oct</c:v>
+                  </c:pt>
+                  <c:pt idx="1">
+                    <c:v>Nov</c:v>
+                  </c:pt>
+                  <c:pt idx="2">
+                    <c:v>Dec</c:v>
+                  </c:pt>
+                  <c:pt idx="3">
+                    <c:v>Jan</c:v>
+                  </c:pt>
+                  <c:pt idx="4">
+                    <c:v>Feb</c:v>
+                  </c:pt>
+                  <c:pt idx="5">
+                    <c:v>Mar</c:v>
+                  </c:pt>
+                  <c:pt idx="6">
+                    <c:v>Apr</c:v>
+                  </c:pt>
+                  <c:pt idx="7">
+                    <c:v>May</c:v>
+                  </c:pt>
+                  <c:pt idx="8">
+                    <c:v>Jun</c:v>
+                  </c:pt>
+                  <c:pt idx="9">
+                    <c:v>Jul</c:v>
+                  </c:pt>
+                  <c:pt idx="10">
+                    <c:v>Aug</c:v>
+                  </c:pt>
+                  <c:pt idx="11">
+                    <c:v>Sep</c:v>
+                  </c:pt>
+                </c:lvl>
+              </c:multiLvlStrCache>
+            </c:multiLvlStrRef>
+          </c:cat>
+          <c:val>
+            <c:numRef>
+              <c:f>Sheet1!$C$2:$C$13</c:f>
+              <c:numCache>
+                <c:formatCode>General</c:formatCode>
+                <c:ptCount val="12"/>
+                <c:pt idx="0">
+                  <c:v>120</c:v>
+                </c:pt>
+                <c:pt idx="1">
+                  <c:v>118</c:v>
+                </c:pt>
+                <c:pt idx="2">
+                  <c:v>125</c:v>
+                </c:pt>
+                <c:pt idx="3">
+                  <c:v>122</c:v>
+                </c:pt>
                 <c:pt idx="4">
-                  <c:v>440</c:v>
+                  <c:v>128</c:v>
                 </c:pt>
                 <c:pt idx="5">
-                  <c:v>470</c:v>
+                  <c:v>130</c:v>
                 </c:pt>
                 <c:pt idx="6">
-                  <c:v>455</c:v>
+                  <c:v>126</c:v>
                 </c:pt>
                 <c:pt idx="7">
-                  <c:v>490</c:v>
+                  <c:v>135</c:v>
                 </c:pt>
                 <c:pt idx="8">
-                  <c:v>520</c:v>
+                  <c:v>138</c:v>
                 </c:pt>
                 <c:pt idx="9">
-                  <c:v>505</c:v>
+                  <c:v>132</c:v>
                 </c:pt>
                 <c:pt idx="10">
-                  <c:v>530</c:v>
+                  <c:v>140</c:v>
                 </c:pt>
                 <c:pt idx="11">
-                  <c:v>560</c:v>
+                  <c:v>142</c:v>
+                </c:pt>
+              </c:numCache>
+            </c:numRef>
+          </c:val>
+        </c:ser>
+        <c:ser>
+          <c:idx val="2"/>
+          <c:order val="2"/>
+          <c:tx>
+            <c:strRef>
+              <c:f>Sheet1!$D$1</c:f>
+              <c:strCache>
+                <c:ptCount val="1"/>
+                <c:pt idx="0">
+                  <c:v>Support</c:v>
+                </c:pt>
+              </c:strCache>
+            </c:strRef>
+          </c:tx>
+          <c:spPr>
+            <a:solidFill>
+              <a:srgbClr val="F33844"/>
+            </a:solidFill>
+            <a:effectLst/>
+          </c:spPr>
+          <c:invertIfNegative val="0"/>
+          <c:dLbls>
+            <c:numFmt formatCode="#,##0" sourceLinked="0"/>
+            <c:txPr>
+              <a:bodyPr/>
+              <a:lstStyle/>
+              <a:p>
+                <a:pPr>
+                  <a:defRPr b="0" i="0" strike="noStrike" sz="1200" u="none">
+                    <a:solidFill>
+                      <a:srgbClr val="000000"/>
+                    </a:solidFill>
+                    <a:latin typeface="Arial"/>
+                  </a:defRPr>
+                </a:pPr>
+              </a:p>
+            </c:txPr>
+            <c:showLegendKey val="0"/>
+            <c:showVal val="0"/>
+            <c:showCatName val="0"/>
+            <c:showSerName val="0"/>
+            <c:showPercent val="0"/>
+            <c:showBubbleSize val="0"/>
+            <c:showLeaderLines val="0"/>
+          </c:dLbls>
+          <c:cat>
+            <c:multiLvlStrRef>
+              <c:f>Sheet1!$A$2:$A$13</c:f>
+              <c:multiLvlStrCache>
+                <c:ptCount val="12"/>
+                <c:lvl>
+                  <c:pt idx="0">
+                    <c:v>Oct</c:v>
+                  </c:pt>
+                  <c:pt idx="1">
+                    <c:v>Nov</c:v>
+                  </c:pt>
+                  <c:pt idx="2">
+                    <c:v>Dec</c:v>
+                  </c:pt>
+                  <c:pt idx="3">
+                    <c:v>Jan</c:v>
+                  </c:pt>
+                  <c:pt idx="4">
+                    <c:v>Feb</c:v>
+                  </c:pt>
+                  <c:pt idx="5">
+                    <c:v>Mar</c:v>
+                  </c:pt>
+                  <c:pt idx="6">
+                    <c:v>Apr</c:v>
+                  </c:pt>
+                  <c:pt idx="7">
+                    <c:v>May</c:v>
+                  </c:pt>
+                  <c:pt idx="8">
+                    <c:v>Jun</c:v>
+                  </c:pt>
+                  <c:pt idx="9">
+                    <c:v>Jul</c:v>
+                  </c:pt>
+                  <c:pt idx="10">
+                    <c:v>Aug</c:v>
+                  </c:pt>
+                  <c:pt idx="11">
+                    <c:v>Sep</c:v>
+                  </c:pt>
+                </c:lvl>
+              </c:multiLvlStrCache>
+            </c:multiLvlStrRef>
+          </c:cat>
+          <c:val>
+            <c:numRef>
+              <c:f>Sheet1!$D$2:$D$13</c:f>
+              <c:numCache>
+                <c:formatCode>General</c:formatCode>
+                <c:ptCount val="12"/>
+                <c:pt idx="0">
+                  <c:v>80</c:v>
+                </c:pt>
+                <c:pt idx="1">
+                  <c:v>82</c:v>
+                </c:pt>
+                <c:pt idx="2">
+                  <c:v>75</c:v>
+                </c:pt>
+                <c:pt idx="3">
+                  <c:v>78</c:v>
+                </c:pt>
+                <c:pt idx="4">
+                  <c:v>72</c:v>
+                </c:pt>
+                <c:pt idx="5">
+                  <c:v>70</c:v>
+                </c:pt>
+                <c:pt idx="6">
+                  <c:v>74</c:v>
+                </c:pt>
+                <c:pt idx="7">
+                  <c:v>65</c:v>
+                </c:pt>
+                <c:pt idx="8">
+                  <c:v>62</c:v>
+                </c:pt>
+                <c:pt idx="9">
+                  <c:v>68</c:v>
+                </c:pt>
+                <c:pt idx="10">
+                  <c:v>60</c:v>
+                </c:pt>
+                <c:pt idx="11">
+                  <c:v>58</c:v>
                 </c:pt>
               </c:numCache>
             </c:numRef>
@@ -270,25 +544,25 @@
             <a:lstStyle/>
             <a:p>
               <a:pPr>
-                <a:defRPr b="0" i="0" strike="noStrike" sz="900" u="none">
+                <a:defRPr b="0" i="0" strike="noStrike" sz="1200" u="none">
                   <a:solidFill>
-                    <a:srgbClr val="595959"/>
+                    <a:srgbClr val="000000"/>
                   </a:solidFill>
-                  <a:latin typeface="Calibri"/>
+                  <a:latin typeface="Arial"/>
                 </a:defRPr>
               </a:pPr>
             </a:p>
           </c:txPr>
           <c:showLegendKey val="0"/>
-          <c:showVal val="1"/>
+          <c:showVal val="0"/>
           <c:showCatName val="0"/>
           <c:showSerName val="0"/>
           <c:showPercent val="0"/>
           <c:showBubbleSize val="0"/>
           <c:showLeaderLines val="0"/>
         </c:dLbls>
-        <c:gapWidth val="150"/>
-        <c:overlap val="0"/>
+        <c:gapWidth val="50"/>
+        <c:overlap val="100"/>
         <c:axId val="2094734554"/>
         <c:axId val="2094734552"/>
         <c:axId val="2094734556"/>
@@ -318,7 +592,7 @@
             <a:pPr>
               <a:defRPr sz="1000" b="0" i="0" u="none" strike="noStrike">
                 <a:solidFill>
-                  <a:srgbClr val="595959"/>
+                  <a:srgbClr val="5F6670"/>
                 </a:solidFill>
                 <a:latin typeface="Calibri"/>
               </a:defRPr>
@@ -343,7 +617,7 @@
           <c:spPr>
             <a:ln w="6350" cap="flat">
               <a:solidFill>
-                <a:srgbClr val="E1E6EF"/>
+                <a:srgbClr val="E3E6EA"/>
               </a:solidFill>
               <a:prstDash val="solid"/>
               <a:round/>
@@ -368,7 +642,7 @@
             <a:pPr>
               <a:defRPr sz="1000" b="0" i="0" u="none" strike="noStrike">
                 <a:solidFill>
-                  <a:srgbClr val="595959"/>
+                  <a:srgbClr val="5F6670"/>
                 </a:solidFill>
                 <a:latin typeface="Calibri"/>
               </a:defRPr>
@@ -388,6 +662,26 @@
         <a:effectLst/>
       </c:spPr>
     </c:plotArea>
+    <c:legend>
+      <c:legendPos val="b"/>
+      <c:overlay val="0"/>
+      <c:txPr>
+        <a:bodyPr/>
+        <a:lstStyle/>
+        <a:p>
+          <a:pPr>
+            <a:defRPr sz="1000">
+              <a:solidFill>
+                <a:srgbClr val="5F6670"/>
+              </a:solidFill>
+              <a:latin typeface="Calibri"/>
+              <a:cs typeface="Calibri"/>
+            </a:defRPr>
+          </a:pPr>
+          <a:endParaRPr lang="en-US"/>
+        </a:p>
+      </c:txPr>
+    </c:legend>
     <c:plotVisOnly val="1"/>
     <c:dispBlanksAs val="span"/>
   </c:chart>
@@ -799,7 +1093,7 @@
           <a:p>
             <a:r>
               <a:rPr lang="en-US" dirty="0"/>
-              <a:t>Cover (dark) layout. The CTS mark on this layout is a placeholder. Replace it with the real logo file on the Slide Master (View &gt; Slide Master).</a:t>
+              <a:t>Cover (dark) layout. The CTS mark on this layout is a placeholder. Replace it with the real logo file on the Slide Master (View &gt; Slide Master). The brand guidelines say the logo is always locked up with the promise "Seamless AV".</a:t>
             </a:r>
             <a:endParaRPr lang="en-US" dirty="0"/>
           </a:p>
@@ -887,7 +1181,7 @@
           <a:p>
             <a:r>
               <a:rPr lang="en-US" dirty="0"/>
-              <a:t>Cover (light) layout. The CTS mark on this layout is a placeholder. Replace it with the real logo file on the Slide Master (View &gt; Slide Master).</a:t>
+              <a:t>Cover (light) layout. The CTS mark on this layout is a placeholder. Replace it with the real logo file on the Slide Master (View &gt; Slide Master). The brand guidelines say the logo is always locked up with the promise "Seamless AV".</a:t>
             </a:r>
             <a:endParaRPr lang="en-US" dirty="0"/>
           </a:p>
@@ -1151,7 +1445,7 @@
           <a:p>
             <a:r>
               <a:rPr lang="en-US" dirty="0"/>
-              <a:t>Header only layout. Delete the sample chart and drop in your own chart, table or image. Chart values are illustrative only.</a:t>
+              <a:t>Header only layout. Delete the sample chart and drop in your own chart, table or image. Chart values are illustrative only. Division colours: Production mint, Consulting lavender, Support rose.</a:t>
             </a:r>
             <a:endParaRPr lang="en-US" dirty="0"/>
           </a:p>
@@ -1493,7 +1787,7 @@
     <p:bg>
       <p:bgPr>
         <a:solidFill>
-          <a:srgbClr val="1F4E79"/>
+          <a:srgbClr val="121820"/>
         </a:solidFill>
       </p:bgPr>
     </p:bg>
@@ -1519,20 +1813,20 @@
         </p:nvSpPr>
         <p:spPr>
           <a:xfrm>
-            <a:off x="6766560" y="-1371600"/>
-            <a:ext cx="3840480" cy="3840480"/>
+            <a:off x="6309360" y="-548640"/>
+            <a:ext cx="3447288" cy="3447288"/>
           </a:xfrm>
           <a:prstGeom prst="ellipse">
             <a:avLst/>
           </a:prstGeom>
           <a:solidFill>
-            <a:srgbClr val="2E74B5">
-              <a:alpha val="35000"/>
+            <a:srgbClr val="3FD0C9">
+              <a:alpha val="85000"/>
             </a:srgbClr>
           </a:solidFill>
           <a:ln w="12700">
             <a:solidFill>
-              <a:srgbClr val="2E74B5">
+              <a:srgbClr val="3FD0C9">
                 <a:alpha val="0"/>
               </a:srgbClr>
             </a:solidFill>
@@ -1548,20 +1842,20 @@
         </p:nvSpPr>
         <p:spPr>
           <a:xfrm>
-            <a:off x="7406640" y="3566160"/>
-            <a:ext cx="3108960" cy="3108960"/>
+            <a:off x="8099298" y="777240"/>
+            <a:ext cx="3447288" cy="3447288"/>
           </a:xfrm>
           <a:prstGeom prst="ellipse">
             <a:avLst/>
           </a:prstGeom>
           <a:solidFill>
-            <a:srgbClr val="2E74B5">
-              <a:alpha val="22000"/>
+            <a:srgbClr val="6D71FF">
+              <a:alpha val="75000"/>
             </a:srgbClr>
           </a:solidFill>
           <a:ln w="12700">
             <a:solidFill>
-              <a:srgbClr val="2E74B5">
+              <a:srgbClr val="6D71FF">
                 <a:alpha val="0"/>
               </a:srgbClr>
             </a:solidFill>
@@ -1577,13 +1871,40 @@
         </p:nvSpPr>
         <p:spPr>
           <a:xfrm>
+            <a:off x="6773418" y="2235708"/>
+            <a:ext cx="3447288" cy="3447288"/>
+          </a:xfrm>
+          <a:prstGeom prst="ellipse">
+            <a:avLst/>
+          </a:prstGeom>
+          <a:solidFill>
+            <a:srgbClr val="F33844">
+              <a:alpha val="70000"/>
+            </a:srgbClr>
+          </a:solidFill>
+          <a:ln w="12700">
+            <a:solidFill>
+              <a:srgbClr val="F33844">
+                <a:alpha val="0"/>
+              </a:srgbClr>
+            </a:solidFill>
+            <a:prstDash val="solid"/>
+          </a:ln>
+        </p:spPr>
+      </p:sp>
+      <p:sp>
+        <p:nvSpPr>
+          <p:cNvPr id="5" name="Shape 3"/>
+          <p:cNvSpPr/>
+          <p:nvPr/>
+        </p:nvSpPr>
+        <p:spPr>
+          <a:xfrm>
             <a:off x="502920" y="411480"/>
             <a:ext cx="457200" cy="457200"/>
           </a:xfrm>
           <a:prstGeom prst="rect">
-            <a:avLst>
-              <a:gd name="adj" fmla="val 20000"/>
-            </a:avLst>
+            <a:avLst/>
           </a:prstGeom>
           <a:solidFill>
             <a:srgbClr val="FFFFFF"/>
@@ -1598,7 +1919,7 @@
       </p:sp>
       <p:sp>
         <p:nvSpPr>
-          <p:cNvPr id="5" name="Text 3"/>
+          <p:cNvPr id="6" name="Text 4"/>
           <p:cNvSpPr/>
           <p:nvPr/>
         </p:nvSpPr>
@@ -1623,7 +1944,7 @@
             <a:r>
               <a:rPr lang="en-US" sz="1300" b="1" spc="100" kern="0" dirty="0">
                 <a:solidFill>
-                  <a:srgbClr val="1F4E79"/>
+                  <a:srgbClr val="121820"/>
                 </a:solidFill>
                 <a:latin typeface="Calibri" pitchFamily="34" charset="0"/>
                 <a:ea typeface="Calibri" pitchFamily="34" charset="-122"/>
@@ -1637,14 +1958,14 @@
       </p:sp>
       <p:sp>
         <p:nvSpPr>
-          <p:cNvPr id="6" name="Text 4"/>
+          <p:cNvPr id="7" name="Text 5"/>
           <p:cNvSpPr/>
           <p:nvPr/>
         </p:nvSpPr>
         <p:spPr>
           <a:xfrm>
-            <a:off x="1097280" y="411480"/>
-            <a:ext cx="3840480" cy="457200"/>
+            <a:off x="1097280" y="393192"/>
+            <a:ext cx="3840480" cy="251460"/>
           </a:xfrm>
           <a:prstGeom prst="rect">
             <a:avLst/>
@@ -1653,14 +1974,14 @@
           <a:ln/>
         </p:spPr>
         <p:txBody>
-          <a:bodyPr wrap="square" lIns="0" tIns="0" rIns="0" bIns="0" rtlCol="0" anchor="ctr"/>
+          <a:bodyPr wrap="square" lIns="0" tIns="0" rIns="0" bIns="0" rtlCol="0" anchor="b"/>
           <a:lstStyle/>
           <a:p>
             <a:pPr indent="0" marL="0">
               <a:buNone/>
             </a:pPr>
             <a:r>
-              <a:rPr lang="en-US" sz="1300" b="1" dirty="0">
+              <a:rPr lang="en-US" sz="1200" b="1" dirty="0">
                 <a:solidFill>
                   <a:srgbClr val="FFFFFF"/>
                 </a:solidFill>
@@ -1670,22 +1991,61 @@
               </a:rPr>
               <a:t>Corporate Technology Services</a:t>
             </a:r>
-            <a:endParaRPr lang="en-US" sz="1300" dirty="0"/>
-          </a:p>
-        </p:txBody>
-      </p:sp>
-      <p:sp>
-        <p:nvSpPr>
-          <p:cNvPr id="7" name="Text 5"/>
-          <p:cNvSpPr/>
-          <p:nvPr>
-            <p:ph idx="105" type="body" hasCustomPrompt="1"/>
+            <a:endParaRPr lang="en-US" sz="1200" dirty="0"/>
+          </a:p>
+        </p:txBody>
+      </p:sp>
+      <p:sp>
+        <p:nvSpPr>
+          <p:cNvPr id="8" name="Text 6"/>
+          <p:cNvSpPr/>
+          <p:nvPr/>
+        </p:nvSpPr>
+        <p:spPr>
+          <a:xfrm>
+            <a:off x="1097280" y="653796"/>
+            <a:ext cx="3840480" cy="214884"/>
+          </a:xfrm>
+          <a:prstGeom prst="rect">
+            <a:avLst/>
+          </a:prstGeom>
+          <a:noFill/>
+          <a:ln/>
+        </p:spPr>
+        <p:txBody>
+          <a:bodyPr wrap="square" lIns="0" tIns="0" rIns="0" bIns="0" rtlCol="0" anchor="t"/>
+          <a:lstStyle/>
+          <a:p>
+            <a:pPr indent="0" marL="0">
+              <a:buNone/>
+            </a:pPr>
+            <a:r>
+              <a:rPr lang="en-US" sz="1000" dirty="0">
+                <a:solidFill>
+                  <a:srgbClr val="C9CED6"/>
+                </a:solidFill>
+                <a:latin typeface="Calibri" pitchFamily="34" charset="0"/>
+                <a:ea typeface="Calibri" pitchFamily="34" charset="-122"/>
+                <a:cs typeface="Calibri" pitchFamily="34" charset="-120"/>
+              </a:rPr>
+              <a:t>Seamless AV</a:t>
+            </a:r>
+            <a:endParaRPr lang="en-US" sz="1000" dirty="0"/>
+          </a:p>
+        </p:txBody>
+      </p:sp>
+      <p:sp>
+        <p:nvSpPr>
+          <p:cNvPr id="9" name="Text 7"/>
+          <p:cNvSpPr/>
+          <p:nvPr>
+            <p:ph idx="107" type="body" hasCustomPrompt="1"/>
           </p:nvPr>
         </p:nvSpPr>
         <p:spPr>
           <a:xfrm>
             <a:off x="502920" y="1828800"/>
-            <a:ext cx="6400800" cy="320040"/>
+            <a:ext cx="5669280" cy="320040"/>
           </a:xfrm>
           <a:prstGeom prst="rect">
             <a:avLst/>
@@ -1700,7 +2060,7 @@
               <a:buNone/>
               <a:defRPr lang="en-US" sz="1200" b="1" spc="300" kern="0" dirty="0">
                 <a:solidFill>
-                  <a:srgbClr val="D9E2F3"/>
+                  <a:srgbClr val="3FD0C9"/>
                 </a:solidFill>
                 <a:latin typeface="Calibri" pitchFamily="34" charset="0"/>
                 <a:ea typeface="Calibri" pitchFamily="34" charset="-122"/>
@@ -1715,7 +2075,7 @@
             <a:r>
               <a:rPr lang="en-US" sz="1200" b="1" spc="300" kern="0" dirty="0">
                 <a:solidFill>
-                  <a:srgbClr val="D9E2F3"/>
+                  <a:srgbClr val="3FD0C9"/>
                 </a:solidFill>
                 <a:latin typeface="Calibri" pitchFamily="34" charset="0"/>
                 <a:ea typeface="Calibri" pitchFamily="34" charset="-122"/>
@@ -1729,16 +2089,16 @@
       </p:sp>
       <p:sp>
         <p:nvSpPr>
-          <p:cNvPr id="8" name="Text 5"/>
-          <p:cNvSpPr/>
-          <p:nvPr>
-            <p:ph idx="106" type="title" hasCustomPrompt="1"/>
+          <p:cNvPr id="10" name="Text 7"/>
+          <p:cNvSpPr/>
+          <p:nvPr>
+            <p:ph idx="108" type="title" hasCustomPrompt="1"/>
           </p:nvPr>
         </p:nvSpPr>
         <p:spPr>
           <a:xfrm>
             <a:off x="502920" y="2148840"/>
-            <a:ext cx="6583680" cy="1234440"/>
+            <a:ext cx="5669280" cy="1234440"/>
           </a:xfrm>
           <a:prstGeom prst="rect">
             <a:avLst/>
@@ -1782,16 +2142,16 @@
       </p:sp>
       <p:sp>
         <p:nvSpPr>
-          <p:cNvPr id="9" name="Text 5"/>
-          <p:cNvSpPr/>
-          <p:nvPr>
-            <p:ph idx="107" type="body" hasCustomPrompt="1"/>
+          <p:cNvPr id="11" name="Text 7"/>
+          <p:cNvSpPr/>
+          <p:nvPr>
+            <p:ph idx="109" type="body" hasCustomPrompt="1"/>
           </p:nvPr>
         </p:nvSpPr>
         <p:spPr>
           <a:xfrm>
             <a:off x="502920" y="3383280"/>
-            <a:ext cx="6583680" cy="548640"/>
+            <a:ext cx="5669280" cy="548640"/>
           </a:xfrm>
           <a:prstGeom prst="rect">
             <a:avLst/>
@@ -1806,7 +2166,7 @@
               <a:buNone/>
               <a:defRPr lang="en-US" sz="1800" dirty="0">
                 <a:solidFill>
-                  <a:srgbClr val="D9E2F3"/>
+                  <a:srgbClr val="C9CED6"/>
                 </a:solidFill>
                 <a:latin typeface="Calibri" pitchFamily="34" charset="0"/>
                 <a:ea typeface="Calibri" pitchFamily="34" charset="-122"/>
@@ -1821,7 +2181,7 @@
             <a:r>
               <a:rPr lang="en-US" sz="1800" dirty="0">
                 <a:solidFill>
-                  <a:srgbClr val="D9E2F3"/>
+                  <a:srgbClr val="C9CED6"/>
                 </a:solidFill>
                 <a:latin typeface="Calibri" pitchFamily="34" charset="0"/>
                 <a:ea typeface="Calibri" pitchFamily="34" charset="-122"/>
@@ -1835,16 +2195,16 @@
       </p:sp>
       <p:sp>
         <p:nvSpPr>
-          <p:cNvPr id="10" name="Text 5"/>
-          <p:cNvSpPr/>
-          <p:nvPr>
-            <p:ph idx="108" type="body" hasCustomPrompt="1"/>
+          <p:cNvPr id="12" name="Text 7"/>
+          <p:cNvSpPr/>
+          <p:nvPr>
+            <p:ph idx="110" type="body" hasCustomPrompt="1"/>
           </p:nvPr>
         </p:nvSpPr>
         <p:spPr>
           <a:xfrm>
             <a:off x="502920" y="4251960"/>
-            <a:ext cx="4114800" cy="502920"/>
+            <a:ext cx="3657600" cy="502920"/>
           </a:xfrm>
           <a:prstGeom prst="rect">
             <a:avLst/>
@@ -1859,7 +2219,7 @@
               <a:buNone/>
               <a:defRPr lang="en-US" sz="1200" dirty="0">
                 <a:solidFill>
-                  <a:srgbClr val="D9E2F3"/>
+                  <a:srgbClr val="C9CED6"/>
                 </a:solidFill>
                 <a:latin typeface="Calibri" pitchFamily="34" charset="0"/>
                 <a:ea typeface="Calibri" pitchFamily="34" charset="-122"/>
@@ -1874,7 +2234,7 @@
             <a:r>
               <a:rPr lang="en-US" sz="1200" dirty="0">
                 <a:solidFill>
-                  <a:srgbClr val="D9E2F3"/>
+                  <a:srgbClr val="C9CED6"/>
                 </a:solidFill>
                 <a:latin typeface="Calibri" pitchFamily="34" charset="0"/>
                 <a:ea typeface="Calibri" pitchFamily="34" charset="-122"/>
@@ -1888,10 +2248,10 @@
       </p:sp>
       <p:sp>
         <p:nvSpPr>
-          <p:cNvPr id="11" name="Text 5"/>
-          <p:cNvSpPr/>
-          <p:nvPr>
-            <p:ph idx="109" type="body" hasCustomPrompt="1"/>
+          <p:cNvPr id="13" name="Text 7"/>
+          <p:cNvSpPr/>
+          <p:nvPr>
+            <p:ph idx="111" type="body" hasCustomPrompt="1"/>
           </p:nvPr>
         </p:nvSpPr>
         <p:spPr>
@@ -1912,7 +2272,7 @@
               <a:buNone/>
               <a:defRPr lang="en-US" sz="1200" dirty="0">
                 <a:solidFill>
-                  <a:srgbClr val="D9E2F3"/>
+                  <a:srgbClr val="C9CED6"/>
                 </a:solidFill>
                 <a:latin typeface="Calibri" pitchFamily="34" charset="0"/>
                 <a:ea typeface="Calibri" pitchFamily="34" charset="-122"/>
@@ -1927,7 +2287,7 @@
             <a:r>
               <a:rPr lang="en-US" sz="1200" dirty="0">
                 <a:solidFill>
-                  <a:srgbClr val="D9E2F3"/>
+                  <a:srgbClr val="C9CED6"/>
                 </a:solidFill>
                 <a:latin typeface="Calibri" pitchFamily="34" charset="0"/>
                 <a:ea typeface="Calibri" pitchFamily="34" charset="-122"/>
@@ -1986,11 +2346,11 @@
             <a:avLst/>
           </a:prstGeom>
           <a:solidFill>
-            <a:srgbClr val="1F4E79"/>
+            <a:srgbClr val="121820"/>
           </a:solidFill>
           <a:ln w="12700">
             <a:solidFill>
-              <a:srgbClr val="1F4E79"/>
+              <a:srgbClr val="121820"/>
             </a:solidFill>
             <a:prstDash val="solid"/>
           </a:ln>
@@ -2004,20 +2364,20 @@
         </p:nvSpPr>
         <p:spPr>
           <a:xfrm>
-            <a:off x="5394960" y="822960"/>
-            <a:ext cx="2743200" cy="2743200"/>
+            <a:off x="5943600" y="365760"/>
+            <a:ext cx="2971800" cy="2971800"/>
           </a:xfrm>
           <a:prstGeom prst="ellipse">
             <a:avLst/>
           </a:prstGeom>
           <a:solidFill>
-            <a:srgbClr val="2E74B5">
-              <a:alpha val="45000"/>
+            <a:srgbClr val="3FD0C9">
+              <a:alpha val="85000"/>
             </a:srgbClr>
           </a:solidFill>
           <a:ln w="12700">
             <a:solidFill>
-              <a:srgbClr val="2E74B5">
+              <a:srgbClr val="3FD0C9">
                 <a:alpha val="0"/>
               </a:srgbClr>
             </a:solidFill>
@@ -2033,20 +2393,20 @@
         </p:nvSpPr>
         <p:spPr>
           <a:xfrm>
-            <a:off x="7406640" y="3108960"/>
-            <a:ext cx="2560320" cy="2560320"/>
+            <a:off x="7486650" y="1508760"/>
+            <a:ext cx="2971800" cy="2971800"/>
           </a:xfrm>
           <a:prstGeom prst="ellipse">
             <a:avLst/>
           </a:prstGeom>
           <a:solidFill>
-            <a:srgbClr val="D9E2F3">
-              <a:alpha val="25000"/>
+            <a:srgbClr val="6D71FF">
+              <a:alpha val="75000"/>
             </a:srgbClr>
           </a:solidFill>
           <a:ln w="12700">
             <a:solidFill>
-              <a:srgbClr val="D9E2F3">
+              <a:srgbClr val="6D71FF">
                 <a:alpha val="0"/>
               </a:srgbClr>
             </a:solidFill>
@@ -2057,6 +2417,35 @@
       <p:sp>
         <p:nvSpPr>
           <p:cNvPr id="5" name="Shape 3"/>
+          <p:cNvSpPr/>
+          <p:nvPr/>
+        </p:nvSpPr>
+        <p:spPr>
+          <a:xfrm>
+            <a:off x="6343650" y="2766060"/>
+            <a:ext cx="2971800" cy="2971800"/>
+          </a:xfrm>
+          <a:prstGeom prst="ellipse">
+            <a:avLst/>
+          </a:prstGeom>
+          <a:solidFill>
+            <a:srgbClr val="F33844">
+              <a:alpha val="70000"/>
+            </a:srgbClr>
+          </a:solidFill>
+          <a:ln w="12700">
+            <a:solidFill>
+              <a:srgbClr val="F33844">
+                <a:alpha val="0"/>
+              </a:srgbClr>
+            </a:solidFill>
+            <a:prstDash val="solid"/>
+          </a:ln>
+        </p:spPr>
+      </p:sp>
+      <p:sp>
+        <p:nvSpPr>
+          <p:cNvPr id="6" name="Shape 4"/>
           <p:cNvSpPr/>
           <p:nvPr/>
         </p:nvSpPr>
@@ -2081,7 +2470,7 @@
       </p:sp>
       <p:sp>
         <p:nvSpPr>
-          <p:cNvPr id="6" name="Shape 4"/>
+          <p:cNvPr id="7" name="Shape 5"/>
           <p:cNvSpPr/>
           <p:nvPr/>
         </p:nvSpPr>
@@ -2091,16 +2480,14 @@
             <a:ext cx="457200" cy="457200"/>
           </a:xfrm>
           <a:prstGeom prst="rect">
-            <a:avLst>
-              <a:gd name="adj" fmla="val 20000"/>
-            </a:avLst>
+            <a:avLst/>
           </a:prstGeom>
           <a:solidFill>
-            <a:srgbClr val="1F4E79"/>
+            <a:srgbClr val="121820"/>
           </a:solidFill>
           <a:ln w="12700">
             <a:solidFill>
-              <a:srgbClr val="1F4E79"/>
+              <a:srgbClr val="121820"/>
             </a:solidFill>
             <a:prstDash val="solid"/>
           </a:ln>
@@ -2108,7 +2495,7 @@
       </p:sp>
       <p:sp>
         <p:nvSpPr>
-          <p:cNvPr id="7" name="Text 5"/>
+          <p:cNvPr id="8" name="Text 6"/>
           <p:cNvSpPr/>
           <p:nvPr/>
         </p:nvSpPr>
@@ -2147,14 +2534,14 @@
       </p:sp>
       <p:sp>
         <p:nvSpPr>
-          <p:cNvPr id="8" name="Text 6"/>
+          <p:cNvPr id="9" name="Text 7"/>
           <p:cNvSpPr/>
           <p:nvPr/>
         </p:nvSpPr>
         <p:spPr>
           <a:xfrm>
-            <a:off x="1097280" y="411480"/>
-            <a:ext cx="3840480" cy="457200"/>
+            <a:off x="1097280" y="393192"/>
+            <a:ext cx="3840480" cy="251460"/>
           </a:xfrm>
           <a:prstGeom prst="rect">
             <a:avLst/>
@@ -2163,16 +2550,16 @@
           <a:ln/>
         </p:spPr>
         <p:txBody>
-          <a:bodyPr wrap="square" lIns="0" tIns="0" rIns="0" bIns="0" rtlCol="0" anchor="ctr"/>
+          <a:bodyPr wrap="square" lIns="0" tIns="0" rIns="0" bIns="0" rtlCol="0" anchor="b"/>
           <a:lstStyle/>
           <a:p>
             <a:pPr indent="0" marL="0">
               <a:buNone/>
             </a:pPr>
             <a:r>
-              <a:rPr lang="en-US" sz="1300" b="1" dirty="0">
-                <a:solidFill>
-                  <a:srgbClr val="1F4E79"/>
+              <a:rPr lang="en-US" sz="1200" b="1" dirty="0">
+                <a:solidFill>
+                  <a:srgbClr val="121820"/>
                 </a:solidFill>
                 <a:latin typeface="Calibri" pitchFamily="34" charset="0"/>
                 <a:ea typeface="Calibri" pitchFamily="34" charset="-122"/>
@@ -2180,16 +2567,55 @@
               </a:rPr>
               <a:t>Corporate Technology Services</a:t>
             </a:r>
-            <a:endParaRPr lang="en-US" sz="1300" dirty="0"/>
-          </a:p>
-        </p:txBody>
-      </p:sp>
-      <p:sp>
-        <p:nvSpPr>
-          <p:cNvPr id="9" name="Text 7"/>
-          <p:cNvSpPr/>
-          <p:nvPr>
-            <p:ph idx="107" type="body" hasCustomPrompt="1"/>
+            <a:endParaRPr lang="en-US" sz="1200" dirty="0"/>
+          </a:p>
+        </p:txBody>
+      </p:sp>
+      <p:sp>
+        <p:nvSpPr>
+          <p:cNvPr id="10" name="Text 8"/>
+          <p:cNvSpPr/>
+          <p:nvPr/>
+        </p:nvSpPr>
+        <p:spPr>
+          <a:xfrm>
+            <a:off x="1097280" y="653796"/>
+            <a:ext cx="3840480" cy="214884"/>
+          </a:xfrm>
+          <a:prstGeom prst="rect">
+            <a:avLst/>
+          </a:prstGeom>
+          <a:noFill/>
+          <a:ln/>
+        </p:spPr>
+        <p:txBody>
+          <a:bodyPr wrap="square" lIns="0" tIns="0" rIns="0" bIns="0" rtlCol="0" anchor="t"/>
+          <a:lstStyle/>
+          <a:p>
+            <a:pPr indent="0" marL="0">
+              <a:buNone/>
+            </a:pPr>
+            <a:r>
+              <a:rPr lang="en-US" sz="1000" dirty="0">
+                <a:solidFill>
+                  <a:srgbClr val="5F6670"/>
+                </a:solidFill>
+                <a:latin typeface="Calibri" pitchFamily="34" charset="0"/>
+                <a:ea typeface="Calibri" pitchFamily="34" charset="-122"/>
+                <a:cs typeface="Calibri" pitchFamily="34" charset="-120"/>
+              </a:rPr>
+              <a:t>Seamless AV</a:t>
+            </a:r>
+            <a:endParaRPr lang="en-US" sz="1000" dirty="0"/>
+          </a:p>
+        </p:txBody>
+      </p:sp>
+      <p:sp>
+        <p:nvSpPr>
+          <p:cNvPr id="11" name="Text 9"/>
+          <p:cNvSpPr/>
+          <p:nvPr>
+            <p:ph idx="109" type="body" hasCustomPrompt="1"/>
           </p:nvPr>
         </p:nvSpPr>
         <p:spPr>
@@ -2210,7 +2636,7 @@
               <a:buNone/>
               <a:defRPr lang="en-US" sz="1200" b="1" spc="300" kern="0" dirty="0">
                 <a:solidFill>
-                  <a:srgbClr val="2E74B5"/>
+                  <a:srgbClr val="122B82"/>
                 </a:solidFill>
                 <a:latin typeface="Calibri" pitchFamily="34" charset="0"/>
                 <a:ea typeface="Calibri" pitchFamily="34" charset="-122"/>
@@ -2225,7 +2651,7 @@
             <a:r>
               <a:rPr lang="en-US" sz="1200" b="1" spc="300" kern="0" dirty="0">
                 <a:solidFill>
-                  <a:srgbClr val="2E74B5"/>
+                  <a:srgbClr val="122B82"/>
                 </a:solidFill>
                 <a:latin typeface="Calibri" pitchFamily="34" charset="0"/>
                 <a:ea typeface="Calibri" pitchFamily="34" charset="-122"/>
@@ -2239,10 +2665,10 @@
       </p:sp>
       <p:sp>
         <p:nvSpPr>
-          <p:cNvPr id="10" name="Text 7"/>
-          <p:cNvSpPr/>
-          <p:nvPr>
-            <p:ph idx="108" type="title" hasCustomPrompt="1"/>
+          <p:cNvPr id="12" name="Text 9"/>
+          <p:cNvSpPr/>
+          <p:nvPr>
+            <p:ph idx="110" type="title" hasCustomPrompt="1"/>
           </p:nvPr>
         </p:nvSpPr>
         <p:spPr>
@@ -2263,7 +2689,7 @@
               <a:buNone/>
               <a:defRPr lang="en-US" sz="3600" b="1" dirty="0">
                 <a:solidFill>
-                  <a:srgbClr val="1F4E79"/>
+                  <a:srgbClr val="121820"/>
                 </a:solidFill>
                 <a:latin typeface="Calibri" pitchFamily="34" charset="0"/>
                 <a:ea typeface="Calibri" pitchFamily="34" charset="-122"/>
@@ -2278,7 +2704,7 @@
             <a:r>
               <a:rPr lang="en-US" sz="3600" b="1" dirty="0">
                 <a:solidFill>
-                  <a:srgbClr val="1F4E79"/>
+                  <a:srgbClr val="121820"/>
                 </a:solidFill>
                 <a:latin typeface="Calibri" pitchFamily="34" charset="0"/>
                 <a:ea typeface="Calibri" pitchFamily="34" charset="-122"/>
@@ -2292,10 +2718,10 @@
       </p:sp>
       <p:sp>
         <p:nvSpPr>
-          <p:cNvPr id="11" name="Text 7"/>
-          <p:cNvSpPr/>
-          <p:nvPr>
-            <p:ph idx="109" type="body" hasCustomPrompt="1"/>
+          <p:cNvPr id="13" name="Text 9"/>
+          <p:cNvSpPr/>
+          <p:nvPr>
+            <p:ph idx="111" type="body" hasCustomPrompt="1"/>
           </p:nvPr>
         </p:nvSpPr>
         <p:spPr>
@@ -2316,7 +2742,7 @@
               <a:buNone/>
               <a:defRPr lang="en-US" sz="1600" dirty="0">
                 <a:solidFill>
-                  <a:srgbClr val="595959"/>
+                  <a:srgbClr val="5F6670"/>
                 </a:solidFill>
                 <a:latin typeface="Calibri" pitchFamily="34" charset="0"/>
                 <a:ea typeface="Calibri" pitchFamily="34" charset="-122"/>
@@ -2331,7 +2757,7 @@
             <a:r>
               <a:rPr lang="en-US" sz="1600" dirty="0">
                 <a:solidFill>
-                  <a:srgbClr val="595959"/>
+                  <a:srgbClr val="5F6670"/>
                 </a:solidFill>
                 <a:latin typeface="Calibri" pitchFamily="34" charset="0"/>
                 <a:ea typeface="Calibri" pitchFamily="34" charset="-122"/>
@@ -2345,10 +2771,10 @@
       </p:sp>
       <p:sp>
         <p:nvSpPr>
-          <p:cNvPr id="12" name="Text 7"/>
-          <p:cNvSpPr/>
-          <p:nvPr>
-            <p:ph idx="110" type="body" hasCustomPrompt="1"/>
+          <p:cNvPr id="14" name="Text 9"/>
+          <p:cNvSpPr/>
+          <p:nvPr>
+            <p:ph idx="112" type="body" hasCustomPrompt="1"/>
           </p:nvPr>
         </p:nvSpPr>
         <p:spPr>
@@ -2369,7 +2795,7 @@
               <a:buNone/>
               <a:defRPr lang="en-US" sz="1200" dirty="0">
                 <a:solidFill>
-                  <a:srgbClr val="595959"/>
+                  <a:srgbClr val="5F6670"/>
                 </a:solidFill>
                 <a:latin typeface="Calibri" pitchFamily="34" charset="0"/>
                 <a:ea typeface="Calibri" pitchFamily="34" charset="-122"/>
@@ -2384,7 +2810,7 @@
             <a:r>
               <a:rPr lang="en-US" sz="1200" dirty="0">
                 <a:solidFill>
-                  <a:srgbClr val="595959"/>
+                  <a:srgbClr val="5F6670"/>
                 </a:solidFill>
                 <a:latin typeface="Calibri" pitchFamily="34" charset="0"/>
                 <a:ea typeface="Calibri" pitchFamily="34" charset="-122"/>
@@ -2398,10 +2824,10 @@
       </p:sp>
       <p:sp>
         <p:nvSpPr>
-          <p:cNvPr id="13" name="Text 7"/>
-          <p:cNvSpPr/>
-          <p:nvPr>
-            <p:ph idx="111" type="body" hasCustomPrompt="1"/>
+          <p:cNvPr id="15" name="Text 9"/>
+          <p:cNvSpPr/>
+          <p:nvPr>
+            <p:ph idx="113" type="body" hasCustomPrompt="1"/>
           </p:nvPr>
         </p:nvSpPr>
         <p:spPr>
@@ -2422,7 +2848,7 @@
               <a:buNone/>
               <a:defRPr lang="en-US" sz="1200" dirty="0">
                 <a:solidFill>
-                  <a:srgbClr val="595959"/>
+                  <a:srgbClr val="5F6670"/>
                 </a:solidFill>
                 <a:latin typeface="Calibri" pitchFamily="34" charset="0"/>
                 <a:ea typeface="Calibri" pitchFamily="34" charset="-122"/>
@@ -2437,7 +2863,7 @@
             <a:r>
               <a:rPr lang="en-US" sz="1200" dirty="0">
                 <a:solidFill>
-                  <a:srgbClr val="595959"/>
+                  <a:srgbClr val="5F6670"/>
                 </a:solidFill>
                 <a:latin typeface="Calibri" pitchFamily="34" charset="0"/>
                 <a:ea typeface="Calibri" pitchFamily="34" charset="-122"/>
@@ -2463,7 +2889,7 @@
     <p:bg>
       <p:bgPr>
         <a:solidFill>
-          <a:srgbClr val="D9E2F3"/>
+          <a:srgbClr val="122B82"/>
         </a:solidFill>
       </p:bgPr>
     </p:bg>
@@ -2489,20 +2915,20 @@
         </p:nvSpPr>
         <p:spPr>
           <a:xfrm>
-            <a:off x="6675120" y="2377440"/>
-            <a:ext cx="4023360" cy="4023360"/>
+            <a:off x="6400800" y="2194560"/>
+            <a:ext cx="4206240" cy="4206240"/>
           </a:xfrm>
           <a:prstGeom prst="ellipse">
             <a:avLst/>
           </a:prstGeom>
           <a:solidFill>
-            <a:srgbClr val="FFFFFF">
-              <a:alpha val="60000"/>
+            <a:srgbClr val="6D71FF">
+              <a:alpha val="45000"/>
             </a:srgbClr>
           </a:solidFill>
           <a:ln w="12700">
             <a:solidFill>
-              <a:srgbClr val="FFFFFF">
+              <a:srgbClr val="6D71FF">
                 <a:alpha val="0"/>
               </a:srgbClr>
             </a:solidFill>
@@ -2537,7 +2963,7 @@
             <a:r>
               <a:rPr lang="en-US" sz="1100" b="1" spc="300" kern="0" dirty="0">
                 <a:solidFill>
-                  <a:srgbClr val="2E74B5"/>
+                  <a:srgbClr val="3FD0C9"/>
                 </a:solidFill>
                 <a:latin typeface="Calibri" pitchFamily="34" charset="0"/>
                 <a:ea typeface="Calibri" pitchFamily="34" charset="-122"/>
@@ -2561,16 +2987,14 @@
             <a:ext cx="384048" cy="384048"/>
           </a:xfrm>
           <a:prstGeom prst="rect">
-            <a:avLst>
-              <a:gd name="adj" fmla="val 20000"/>
-            </a:avLst>
+            <a:avLst/>
           </a:prstGeom>
           <a:solidFill>
-            <a:srgbClr val="1F4E79"/>
+            <a:srgbClr val="FFFFFF"/>
           </a:solidFill>
           <a:ln w="12700">
             <a:solidFill>
-              <a:srgbClr val="1F4E79"/>
+              <a:srgbClr val="FFFFFF"/>
             </a:solidFill>
             <a:prstDash val="solid"/>
           </a:ln>
@@ -2603,7 +3027,7 @@
             <a:r>
               <a:rPr lang="en-US" sz="1092" b="1" spc="100" kern="0" dirty="0">
                 <a:solidFill>
-                  <a:srgbClr val="FFFFFF"/>
+                  <a:srgbClr val="121820"/>
                 </a:solidFill>
                 <a:latin typeface="Calibri" pitchFamily="34" charset="0"/>
                 <a:ea typeface="Calibri" pitchFamily="34" charset="-122"/>
@@ -2627,16 +3051,14 @@
             <a:ext cx="1280160" cy="1280160"/>
           </a:xfrm>
           <a:prstGeom prst="rect">
-            <a:avLst>
-              <a:gd name="adj" fmla="val 20000"/>
-            </a:avLst>
+            <a:avLst/>
           </a:prstGeom>
           <a:solidFill>
-            <a:srgbClr val="1F4E79"/>
+            <a:srgbClr val="3FD0C9"/>
           </a:solidFill>
           <a:ln w="12700">
             <a:solidFill>
-              <a:srgbClr val="1F4E79"/>
+              <a:srgbClr val="3FD0C9"/>
             </a:solidFill>
             <a:prstDash val="solid"/>
           </a:ln>
@@ -2668,7 +3090,7 @@
               <a:buNone/>
               <a:defRPr lang="en-US" sz="4800" b="1" dirty="0">
                 <a:solidFill>
-                  <a:srgbClr val="FFFFFF"/>
+                  <a:srgbClr val="121820"/>
                 </a:solidFill>
                 <a:latin typeface="Calibri" pitchFamily="34" charset="0"/>
                 <a:ea typeface="Calibri" pitchFamily="34" charset="-122"/>
@@ -2683,7 +3105,7 @@
             <a:r>
               <a:rPr lang="en-US" sz="4800" b="1" dirty="0">
                 <a:solidFill>
-                  <a:srgbClr val="FFFFFF"/>
+                  <a:srgbClr val="121820"/>
                 </a:solidFill>
                 <a:latin typeface="Calibri" pitchFamily="34" charset="0"/>
                 <a:ea typeface="Calibri" pitchFamily="34" charset="-122"/>
@@ -2721,7 +3143,7 @@
               <a:buNone/>
               <a:defRPr lang="en-US" sz="3600" b="1" dirty="0">
                 <a:solidFill>
-                  <a:srgbClr val="1F4E79"/>
+                  <a:srgbClr val="FFFFFF"/>
                 </a:solidFill>
                 <a:latin typeface="Calibri" pitchFamily="34" charset="0"/>
                 <a:ea typeface="Calibri" pitchFamily="34" charset="-122"/>
@@ -2736,7 +3158,7 @@
             <a:r>
               <a:rPr lang="en-US" sz="3600" b="1" dirty="0">
                 <a:solidFill>
-                  <a:srgbClr val="1F4E79"/>
+                  <a:srgbClr val="FFFFFF"/>
                 </a:solidFill>
                 <a:latin typeface="Calibri" pitchFamily="34" charset="0"/>
                 <a:ea typeface="Calibri" pitchFamily="34" charset="-122"/>
@@ -2774,7 +3196,7 @@
               <a:buNone/>
               <a:defRPr lang="en-US" sz="1600" dirty="0">
                 <a:solidFill>
-                  <a:srgbClr val="595959"/>
+                  <a:srgbClr val="C9CED6"/>
                 </a:solidFill>
                 <a:latin typeface="Calibri" pitchFamily="34" charset="0"/>
                 <a:ea typeface="Calibri" pitchFamily="34" charset="-122"/>
@@ -2789,7 +3211,7 @@
             <a:r>
               <a:rPr lang="en-US" sz="1600" dirty="0">
                 <a:solidFill>
-                  <a:srgbClr val="595959"/>
+                  <a:srgbClr val="C9CED6"/>
                 </a:solidFill>
                 <a:latin typeface="Calibri" pitchFamily="34" charset="0"/>
                 <a:ea typeface="Calibri" pitchFamily="34" charset="-122"/>
@@ -2810,7 +3232,7 @@
         <p:spPr>
           <a:xfrm>
             <a:off x="502920" y="4759452"/>
-            <a:ext cx="3657600" cy="228600"/>
+            <a:ext cx="4114800" cy="228600"/>
           </a:xfrm>
           <a:prstGeom prst="rect">
             <a:avLst/>
@@ -2828,13 +3250,13 @@
             <a:r>
               <a:rPr lang="en-US" sz="900" dirty="0">
                 <a:solidFill>
-                  <a:srgbClr val="595959"/>
-                </a:solidFill>
-                <a:latin typeface="Calibri" pitchFamily="34" charset="0"/>
-                <a:ea typeface="Calibri" pitchFamily="34" charset="-122"/>
-                <a:cs typeface="Calibri" pitchFamily="34" charset="-120"/>
-              </a:rPr>
-              <a:t>Corporate Technology Services</a:t>
+                  <a:srgbClr val="C9CED6"/>
+                </a:solidFill>
+                <a:latin typeface="Calibri" pitchFamily="34" charset="0"/>
+                <a:ea typeface="Calibri" pitchFamily="34" charset="-122"/>
+                <a:cs typeface="Calibri" pitchFamily="34" charset="-120"/>
+              </a:rPr>
+              <a:t>Corporate Technology Services  |  Seamless AV</a:t>
             </a:r>
             <a:endParaRPr lang="en-US" sz="900" dirty="0"/>
           </a:p>
@@ -2870,7 +3292,7 @@
             <a:lvl1pPr>
               <a:defRPr sz="900">
                 <a:solidFill>
-                  <a:srgbClr val="595959"/>
+                  <a:srgbClr val="C9CED6"/>
                 </a:solidFill>
                 <a:latin typeface="Calibri"/>
                 <a:ea typeface="Calibri"/>
@@ -2946,7 +3368,7 @@
               <a:buNone/>
               <a:defRPr lang="en-US" sz="1000" b="1" spc="300" kern="0" dirty="0">
                 <a:solidFill>
-                  <a:srgbClr val="2E74B5"/>
+                  <a:srgbClr val="122B82"/>
                 </a:solidFill>
                 <a:latin typeface="Calibri" pitchFamily="34" charset="0"/>
                 <a:ea typeface="Calibri" pitchFamily="34" charset="-122"/>
@@ -2961,7 +3383,7 @@
             <a:r>
               <a:rPr lang="en-US" sz="1000" b="1" spc="300" kern="0" dirty="0">
                 <a:solidFill>
-                  <a:srgbClr val="2E74B5"/>
+                  <a:srgbClr val="122B82"/>
                 </a:solidFill>
                 <a:latin typeface="Calibri" pitchFamily="34" charset="0"/>
                 <a:ea typeface="Calibri" pitchFamily="34" charset="-122"/>
@@ -2999,7 +3421,7 @@
               <a:buNone/>
               <a:defRPr lang="en-US" sz="2800" b="1" dirty="0">
                 <a:solidFill>
-                  <a:srgbClr val="1F4E79"/>
+                  <a:srgbClr val="121820"/>
                 </a:solidFill>
                 <a:latin typeface="Calibri" pitchFamily="34" charset="0"/>
                 <a:ea typeface="Calibri" pitchFamily="34" charset="-122"/>
@@ -3014,7 +3436,7 @@
             <a:r>
               <a:rPr lang="en-US" sz="2800" b="1" dirty="0">
                 <a:solidFill>
-                  <a:srgbClr val="1F4E79"/>
+                  <a:srgbClr val="121820"/>
                 </a:solidFill>
                 <a:latin typeface="Calibri" pitchFamily="34" charset="0"/>
                 <a:ea typeface="Calibri" pitchFamily="34" charset="-122"/>
@@ -3038,16 +3460,14 @@
             <a:ext cx="384048" cy="384048"/>
           </a:xfrm>
           <a:prstGeom prst="rect">
-            <a:avLst>
-              <a:gd name="adj" fmla="val 20000"/>
-            </a:avLst>
+            <a:avLst/>
           </a:prstGeom>
           <a:solidFill>
-            <a:srgbClr val="1F4E79"/>
+            <a:srgbClr val="121820"/>
           </a:solidFill>
           <a:ln w="12700">
             <a:solidFill>
-              <a:srgbClr val="1F4E79"/>
+              <a:srgbClr val="121820"/>
             </a:solidFill>
             <a:prstDash val="solid"/>
           </a:ln>
@@ -3101,7 +3521,7 @@
         <p:spPr>
           <a:xfrm>
             <a:off x="502920" y="4759452"/>
-            <a:ext cx="3657600" cy="228600"/>
+            <a:ext cx="4114800" cy="228600"/>
           </a:xfrm>
           <a:prstGeom prst="rect">
             <a:avLst/>
@@ -3119,13 +3539,13 @@
             <a:r>
               <a:rPr lang="en-US" sz="900" dirty="0">
                 <a:solidFill>
-                  <a:srgbClr val="595959"/>
-                </a:solidFill>
-                <a:latin typeface="Calibri" pitchFamily="34" charset="0"/>
-                <a:ea typeface="Calibri" pitchFamily="34" charset="-122"/>
-                <a:cs typeface="Calibri" pitchFamily="34" charset="-120"/>
-              </a:rPr>
-              <a:t>Corporate Technology Services</a:t>
+                  <a:srgbClr val="5F6670"/>
+                </a:solidFill>
+                <a:latin typeface="Calibri" pitchFamily="34" charset="0"/>
+                <a:ea typeface="Calibri" pitchFamily="34" charset="-122"/>
+                <a:cs typeface="Calibri" pitchFamily="34" charset="-120"/>
+              </a:rPr>
+              <a:t>Corporate Technology Services  |  Seamless AV</a:t>
             </a:r>
             <a:endParaRPr lang="en-US" sz="900" dirty="0"/>
           </a:p>
@@ -3161,7 +3581,7 @@
             <a:lvl1pPr>
               <a:defRPr sz="900">
                 <a:solidFill>
-                  <a:srgbClr val="595959"/>
+                  <a:srgbClr val="5F6670"/>
                 </a:solidFill>
                 <a:latin typeface="Calibri"/>
                 <a:ea typeface="Calibri"/>
@@ -3237,7 +3657,7 @@
               <a:buNone/>
               <a:defRPr lang="en-US" sz="1000" b="1" spc="300" kern="0" dirty="0">
                 <a:solidFill>
-                  <a:srgbClr val="2E74B5"/>
+                  <a:srgbClr val="122B82"/>
                 </a:solidFill>
                 <a:latin typeface="Calibri" pitchFamily="34" charset="0"/>
                 <a:ea typeface="Calibri" pitchFamily="34" charset="-122"/>
@@ -3252,7 +3672,7 @@
             <a:r>
               <a:rPr lang="en-US" sz="1000" b="1" spc="300" kern="0" dirty="0">
                 <a:solidFill>
-                  <a:srgbClr val="2E74B5"/>
+                  <a:srgbClr val="122B82"/>
                 </a:solidFill>
                 <a:latin typeface="Calibri" pitchFamily="34" charset="0"/>
                 <a:ea typeface="Calibri" pitchFamily="34" charset="-122"/>
@@ -3290,7 +3710,7 @@
               <a:buNone/>
               <a:defRPr lang="en-US" sz="2800" b="1" dirty="0">
                 <a:solidFill>
-                  <a:srgbClr val="1F4E79"/>
+                  <a:srgbClr val="121820"/>
                 </a:solidFill>
                 <a:latin typeface="Calibri" pitchFamily="34" charset="0"/>
                 <a:ea typeface="Calibri" pitchFamily="34" charset="-122"/>
@@ -3305,7 +3725,7 @@
             <a:r>
               <a:rPr lang="en-US" sz="2800" b="1" dirty="0">
                 <a:solidFill>
-                  <a:srgbClr val="1F4E79"/>
+                  <a:srgbClr val="121820"/>
                 </a:solidFill>
                 <a:latin typeface="Calibri" pitchFamily="34" charset="0"/>
                 <a:ea typeface="Calibri" pitchFamily="34" charset="-122"/>
@@ -3329,16 +3749,14 @@
             <a:ext cx="384048" cy="384048"/>
           </a:xfrm>
           <a:prstGeom prst="rect">
-            <a:avLst>
-              <a:gd name="adj" fmla="val 20000"/>
-            </a:avLst>
+            <a:avLst/>
           </a:prstGeom>
           <a:solidFill>
-            <a:srgbClr val="1F4E79"/>
+            <a:srgbClr val="121820"/>
           </a:solidFill>
           <a:ln w="12700">
             <a:solidFill>
-              <a:srgbClr val="1F4E79"/>
+              <a:srgbClr val="121820"/>
             </a:solidFill>
             <a:prstDash val="solid"/>
           </a:ln>
@@ -3392,7 +3810,7 @@
         <p:spPr>
           <a:xfrm>
             <a:off x="502920" y="4759452"/>
-            <a:ext cx="3657600" cy="228600"/>
+            <a:ext cx="4114800" cy="228600"/>
           </a:xfrm>
           <a:prstGeom prst="rect">
             <a:avLst/>
@@ -3410,13 +3828,13 @@
             <a:r>
               <a:rPr lang="en-US" sz="900" dirty="0">
                 <a:solidFill>
-                  <a:srgbClr val="595959"/>
-                </a:solidFill>
-                <a:latin typeface="Calibri" pitchFamily="34" charset="0"/>
-                <a:ea typeface="Calibri" pitchFamily="34" charset="-122"/>
-                <a:cs typeface="Calibri" pitchFamily="34" charset="-120"/>
-              </a:rPr>
-              <a:t>Corporate Technology Services</a:t>
+                  <a:srgbClr val="5F6670"/>
+                </a:solidFill>
+                <a:latin typeface="Calibri" pitchFamily="34" charset="0"/>
+                <a:ea typeface="Calibri" pitchFamily="34" charset="-122"/>
+                <a:cs typeface="Calibri" pitchFamily="34" charset="-120"/>
+              </a:rPr>
+              <a:t>Corporate Technology Services  |  Seamless AV</a:t>
             </a:r>
             <a:endParaRPr lang="en-US" sz="900" dirty="0"/>
           </a:p>
@@ -3452,7 +3870,7 @@
               <a:buChar char="•"/>
               <a:defRPr lang="en-US" sz="1600" dirty="0">
                 <a:solidFill>
-                  <a:srgbClr val="262626"/>
+                  <a:srgbClr val="121820"/>
                 </a:solidFill>
                 <a:latin typeface="Calibri" pitchFamily="34" charset="0"/>
                 <a:ea typeface="Calibri" pitchFamily="34" charset="-122"/>
@@ -3471,7 +3889,7 @@
             <a:r>
               <a:rPr lang="en-US" sz="1600" dirty="0">
                 <a:solidFill>
-                  <a:srgbClr val="262626"/>
+                  <a:srgbClr val="121820"/>
                 </a:solidFill>
                 <a:latin typeface="Calibri" pitchFamily="34" charset="0"/>
                 <a:ea typeface="Calibri" pitchFamily="34" charset="-122"/>
@@ -3513,7 +3931,7 @@
             <a:lvl1pPr>
               <a:defRPr sz="900">
                 <a:solidFill>
-                  <a:srgbClr val="595959"/>
+                  <a:srgbClr val="5F6670"/>
                 </a:solidFill>
                 <a:latin typeface="Calibri"/>
                 <a:ea typeface="Calibri"/>
@@ -3586,7 +4004,7 @@
             <a:lvl1pPr>
               <a:defRPr sz="900">
                 <a:solidFill>
-                  <a:srgbClr val="595959"/>
+                  <a:srgbClr val="C9CED6"/>
                 </a:solidFill>
                 <a:latin typeface="Calibri"/>
                 <a:ea typeface="Calibri"/>
@@ -3888,16 +4306,16 @@
       </p:grpSpPr>
       <p:sp>
         <p:nvSpPr>
-          <p:cNvPr id="2" name="Text 5"/>
-          <p:cNvSpPr/>
-          <p:nvPr>
-            <p:ph idx="105" type="body" hasCustomPrompt="1"/>
+          <p:cNvPr id="2" name="Text 7"/>
+          <p:cNvSpPr/>
+          <p:nvPr>
+            <p:ph idx="107" type="body" hasCustomPrompt="1"/>
           </p:nvPr>
         </p:nvSpPr>
         <p:spPr>
           <a:xfrm>
             <a:off x="502920" y="1828800"/>
-            <a:ext cx="6400800" cy="320040"/>
+            <a:ext cx="5669280" cy="320040"/>
           </a:xfrm>
           <a:prstGeom prst="rect">
             <a:avLst/>
@@ -3915,7 +4333,7 @@
             <a:r>
               <a:rPr lang="en-US" sz="1200" b="1" spc="300" kern="0" dirty="0">
                 <a:solidFill>
-                  <a:srgbClr val="D9E2F3"/>
+                  <a:srgbClr val="3FD0C9"/>
                 </a:solidFill>
                 <a:latin typeface="Calibri" pitchFamily="34" charset="0"/>
                 <a:ea typeface="Calibri" pitchFamily="34" charset="-122"/>
@@ -3929,16 +4347,16 @@
       </p:sp>
       <p:sp>
         <p:nvSpPr>
-          <p:cNvPr id="3" name="Text 5"/>
-          <p:cNvSpPr/>
-          <p:nvPr>
-            <p:ph idx="106" type="title" hasCustomPrompt="1"/>
+          <p:cNvPr id="3" name="Text 7"/>
+          <p:cNvSpPr/>
+          <p:nvPr>
+            <p:ph idx="108" type="title" hasCustomPrompt="1"/>
           </p:nvPr>
         </p:nvSpPr>
         <p:spPr>
           <a:xfrm>
             <a:off x="502920" y="2148840"/>
-            <a:ext cx="6583680" cy="1234440"/>
+            <a:ext cx="5669280" cy="1234440"/>
           </a:xfrm>
           <a:prstGeom prst="rect">
             <a:avLst/>
@@ -3970,16 +4388,16 @@
       </p:sp>
       <p:sp>
         <p:nvSpPr>
-          <p:cNvPr id="4" name="Text 5"/>
-          <p:cNvSpPr/>
-          <p:nvPr>
-            <p:ph idx="107" type="body" hasCustomPrompt="1"/>
+          <p:cNvPr id="4" name="Text 7"/>
+          <p:cNvSpPr/>
+          <p:nvPr>
+            <p:ph idx="109" type="body" hasCustomPrompt="1"/>
           </p:nvPr>
         </p:nvSpPr>
         <p:spPr>
           <a:xfrm>
             <a:off x="502920" y="3383280"/>
-            <a:ext cx="6583680" cy="548640"/>
+            <a:ext cx="5669280" cy="548640"/>
           </a:xfrm>
           <a:prstGeom prst="rect">
             <a:avLst/>
@@ -3997,7 +4415,7 @@
             <a:r>
               <a:rPr lang="en-US" sz="1800" dirty="0">
                 <a:solidFill>
-                  <a:srgbClr val="D9E2F3"/>
+                  <a:srgbClr val="C9CED6"/>
                 </a:solidFill>
                 <a:latin typeface="Calibri" pitchFamily="34" charset="0"/>
                 <a:ea typeface="Calibri" pitchFamily="34" charset="-122"/>
@@ -4011,16 +4429,16 @@
       </p:sp>
       <p:sp>
         <p:nvSpPr>
-          <p:cNvPr id="5" name="Text 5"/>
-          <p:cNvSpPr/>
-          <p:nvPr>
-            <p:ph idx="108" type="body" hasCustomPrompt="1"/>
+          <p:cNvPr id="5" name="Text 7"/>
+          <p:cNvSpPr/>
+          <p:nvPr>
+            <p:ph idx="110" type="body" hasCustomPrompt="1"/>
           </p:nvPr>
         </p:nvSpPr>
         <p:spPr>
           <a:xfrm>
             <a:off x="502920" y="4251960"/>
-            <a:ext cx="4114800" cy="502920"/>
+            <a:ext cx="3657600" cy="502920"/>
           </a:xfrm>
           <a:prstGeom prst="rect">
             <a:avLst/>
@@ -4038,7 +4456,7 @@
             <a:r>
               <a:rPr lang="en-US" sz="1200" dirty="0">
                 <a:solidFill>
-                  <a:srgbClr val="D9E2F3"/>
+                  <a:srgbClr val="C9CED6"/>
                 </a:solidFill>
                 <a:latin typeface="Calibri" pitchFamily="34" charset="0"/>
                 <a:ea typeface="Calibri" pitchFamily="34" charset="-122"/>
@@ -4052,10 +4470,10 @@
       </p:sp>
       <p:sp>
         <p:nvSpPr>
-          <p:cNvPr id="6" name="Text 5"/>
-          <p:cNvSpPr/>
-          <p:nvPr>
-            <p:ph idx="109" type="body" hasCustomPrompt="1"/>
+          <p:cNvPr id="6" name="Text 7"/>
+          <p:cNvSpPr/>
+          <p:nvPr>
+            <p:ph idx="111" type="body" hasCustomPrompt="1"/>
           </p:nvPr>
         </p:nvSpPr>
         <p:spPr>
@@ -4079,7 +4497,7 @@
             <a:r>
               <a:rPr lang="en-US" sz="1200" dirty="0">
                 <a:solidFill>
-                  <a:srgbClr val="D9E2F3"/>
+                  <a:srgbClr val="C9CED6"/>
                 </a:solidFill>
                 <a:latin typeface="Calibri" pitchFamily="34" charset="0"/>
                 <a:ea typeface="Calibri" pitchFamily="34" charset="-122"/>
@@ -4118,10 +4536,10 @@
       </p:grpSpPr>
       <p:sp>
         <p:nvSpPr>
-          <p:cNvPr id="2" name="Text 7"/>
-          <p:cNvSpPr/>
-          <p:nvPr>
-            <p:ph idx="107" type="body" hasCustomPrompt="1"/>
+          <p:cNvPr id="2" name="Text 9"/>
+          <p:cNvSpPr/>
+          <p:nvPr>
+            <p:ph idx="109" type="body" hasCustomPrompt="1"/>
           </p:nvPr>
         </p:nvSpPr>
         <p:spPr>
@@ -4145,7 +4563,7 @@
             <a:r>
               <a:rPr lang="en-US" sz="1200" b="1" spc="300" kern="0" dirty="0">
                 <a:solidFill>
-                  <a:srgbClr val="2E74B5"/>
+                  <a:srgbClr val="122B82"/>
                 </a:solidFill>
                 <a:latin typeface="Calibri" pitchFamily="34" charset="0"/>
                 <a:ea typeface="Calibri" pitchFamily="34" charset="-122"/>
@@ -4159,10 +4577,10 @@
       </p:sp>
       <p:sp>
         <p:nvSpPr>
-          <p:cNvPr id="3" name="Text 7"/>
-          <p:cNvSpPr/>
-          <p:nvPr>
-            <p:ph idx="108" type="title" hasCustomPrompt="1"/>
+          <p:cNvPr id="3" name="Text 9"/>
+          <p:cNvSpPr/>
+          <p:nvPr>
+            <p:ph idx="110" type="title" hasCustomPrompt="1"/>
           </p:nvPr>
         </p:nvSpPr>
         <p:spPr>
@@ -4186,7 +4604,7 @@
             <a:r>
               <a:rPr lang="en-US" sz="3600" b="1" dirty="0">
                 <a:solidFill>
-                  <a:srgbClr val="1F4E79"/>
+                  <a:srgbClr val="121820"/>
                 </a:solidFill>
                 <a:latin typeface="Calibri" pitchFamily="34" charset="0"/>
                 <a:ea typeface="Calibri" pitchFamily="34" charset="-122"/>
@@ -4200,10 +4618,10 @@
       </p:sp>
       <p:sp>
         <p:nvSpPr>
-          <p:cNvPr id="4" name="Text 7"/>
-          <p:cNvSpPr/>
-          <p:nvPr>
-            <p:ph idx="109" type="body" hasCustomPrompt="1"/>
+          <p:cNvPr id="4" name="Text 9"/>
+          <p:cNvSpPr/>
+          <p:nvPr>
+            <p:ph idx="111" type="body" hasCustomPrompt="1"/>
           </p:nvPr>
         </p:nvSpPr>
         <p:spPr>
@@ -4227,7 +4645,7 @@
             <a:r>
               <a:rPr lang="en-US" sz="1600" dirty="0">
                 <a:solidFill>
-                  <a:srgbClr val="595959"/>
+                  <a:srgbClr val="5F6670"/>
                 </a:solidFill>
                 <a:latin typeface="Calibri" pitchFamily="34" charset="0"/>
                 <a:ea typeface="Calibri" pitchFamily="34" charset="-122"/>
@@ -4241,10 +4659,10 @@
       </p:sp>
       <p:sp>
         <p:nvSpPr>
-          <p:cNvPr id="5" name="Text 7"/>
-          <p:cNvSpPr/>
-          <p:nvPr>
-            <p:ph idx="110" type="body" hasCustomPrompt="1"/>
+          <p:cNvPr id="5" name="Text 9"/>
+          <p:cNvSpPr/>
+          <p:nvPr>
+            <p:ph idx="112" type="body" hasCustomPrompt="1"/>
           </p:nvPr>
         </p:nvSpPr>
         <p:spPr>
@@ -4268,7 +4686,7 @@
             <a:r>
               <a:rPr lang="en-US" sz="1200" dirty="0">
                 <a:solidFill>
-                  <a:srgbClr val="595959"/>
+                  <a:srgbClr val="5F6670"/>
                 </a:solidFill>
                 <a:latin typeface="Calibri" pitchFamily="34" charset="0"/>
                 <a:ea typeface="Calibri" pitchFamily="34" charset="-122"/>
@@ -4282,10 +4700,10 @@
       </p:sp>
       <p:sp>
         <p:nvSpPr>
-          <p:cNvPr id="6" name="Text 7"/>
-          <p:cNvSpPr/>
-          <p:nvPr>
-            <p:ph idx="111" type="body" hasCustomPrompt="1"/>
+          <p:cNvPr id="6" name="Text 9"/>
+          <p:cNvSpPr/>
+          <p:nvPr>
+            <p:ph idx="113" type="body" hasCustomPrompt="1"/>
           </p:nvPr>
         </p:nvSpPr>
         <p:spPr>
@@ -4309,7 +4727,7 @@
             <a:r>
               <a:rPr lang="en-US" sz="1200" dirty="0">
                 <a:solidFill>
-                  <a:srgbClr val="595959"/>
+                  <a:srgbClr val="5F6670"/>
                 </a:solidFill>
                 <a:latin typeface="Calibri" pitchFamily="34" charset="0"/>
                 <a:ea typeface="Calibri" pitchFamily="34" charset="-122"/>
@@ -4375,7 +4793,7 @@
             <a:r>
               <a:rPr lang="en-US" sz="4800" b="1" dirty="0">
                 <a:solidFill>
-                  <a:srgbClr val="FFFFFF"/>
+                  <a:srgbClr val="121820"/>
                 </a:solidFill>
                 <a:latin typeface="Calibri" pitchFamily="34" charset="0"/>
                 <a:ea typeface="Calibri" pitchFamily="34" charset="-122"/>
@@ -4416,7 +4834,7 @@
             <a:r>
               <a:rPr lang="en-US" sz="3600" b="1" dirty="0">
                 <a:solidFill>
-                  <a:srgbClr val="1F4E79"/>
+                  <a:srgbClr val="FFFFFF"/>
                 </a:solidFill>
                 <a:latin typeface="Calibri" pitchFamily="34" charset="0"/>
                 <a:ea typeface="Calibri" pitchFamily="34" charset="-122"/>
@@ -4457,7 +4875,7 @@
             <a:r>
               <a:rPr lang="en-US" sz="1600" dirty="0">
                 <a:solidFill>
-                  <a:srgbClr val="595959"/>
+                  <a:srgbClr val="C9CED6"/>
                 </a:solidFill>
                 <a:latin typeface="Calibri" pitchFamily="34" charset="0"/>
                 <a:ea typeface="Calibri" pitchFamily="34" charset="-122"/>
@@ -4499,7 +4917,7 @@
             <a:lvl1pPr>
               <a:defRPr sz="900">
                 <a:solidFill>
-                  <a:srgbClr val="595959"/>
+                  <a:srgbClr val="C9CED6"/>
                 </a:solidFill>
                 <a:latin typeface="Calibri"/>
                 <a:ea typeface="Calibri"/>
@@ -4571,7 +4989,7 @@
             <a:r>
               <a:rPr lang="en-US" sz="4800" b="1" dirty="0">
                 <a:solidFill>
-                  <a:srgbClr val="FFFFFF"/>
+                  <a:srgbClr val="121820"/>
                 </a:solidFill>
                 <a:latin typeface="Calibri" pitchFamily="34" charset="0"/>
                 <a:ea typeface="Calibri" pitchFamily="34" charset="-122"/>
@@ -4612,7 +5030,7 @@
             <a:r>
               <a:rPr lang="en-US" sz="3600" b="1" dirty="0">
                 <a:solidFill>
-                  <a:srgbClr val="1F4E79"/>
+                  <a:srgbClr val="FFFFFF"/>
                 </a:solidFill>
                 <a:latin typeface="Calibri" pitchFamily="34" charset="0"/>
                 <a:ea typeface="Calibri" pitchFamily="34" charset="-122"/>
@@ -4653,7 +5071,7 @@
             <a:r>
               <a:rPr lang="en-US" sz="1600" dirty="0">
                 <a:solidFill>
-                  <a:srgbClr val="595959"/>
+                  <a:srgbClr val="C9CED6"/>
                 </a:solidFill>
                 <a:latin typeface="Calibri" pitchFamily="34" charset="0"/>
                 <a:ea typeface="Calibri" pitchFamily="34" charset="-122"/>
@@ -4695,7 +5113,7 @@
             <a:lvl1pPr>
               <a:defRPr sz="900">
                 <a:solidFill>
-                  <a:srgbClr val="595959"/>
+                  <a:srgbClr val="C9CED6"/>
                 </a:solidFill>
                 <a:latin typeface="Calibri"/>
                 <a:ea typeface="Calibri"/>
@@ -4767,7 +5185,7 @@
             <a:r>
               <a:rPr lang="en-US" sz="1000" b="1" spc="300" kern="0" dirty="0">
                 <a:solidFill>
-                  <a:srgbClr val="2E74B5"/>
+                  <a:srgbClr val="122B82"/>
                 </a:solidFill>
                 <a:latin typeface="Calibri" pitchFamily="34" charset="0"/>
                 <a:ea typeface="Calibri" pitchFamily="34" charset="-122"/>
@@ -4808,13 +5226,13 @@
             <a:r>
               <a:rPr lang="en-US" sz="2800" b="1" dirty="0">
                 <a:solidFill>
-                  <a:srgbClr val="1F4E79"/>
-                </a:solidFill>
-                <a:latin typeface="Calibri" pitchFamily="34" charset="0"/>
-                <a:ea typeface="Calibri" pitchFamily="34" charset="-122"/>
-                <a:cs typeface="Calibri" pitchFamily="34" charset="-120"/>
-              </a:rPr>
-              <a:t>Revenue by client, rolling twelve months</a:t>
+                  <a:srgbClr val="121820"/>
+                </a:solidFill>
+                <a:latin typeface="Calibri" pitchFamily="34" charset="0"/>
+                <a:ea typeface="Calibri" pitchFamily="34" charset="-122"/>
+                <a:cs typeface="Calibri" pitchFamily="34" charset="-120"/>
+              </a:rPr>
+              <a:t>Revenue by division, rolling twelve months</a:t>
             </a:r>
             <a:endParaRPr lang="en-US" sz="2800" dirty="0"/>
           </a:p>
@@ -4866,7 +5284,7 @@
             <a:lvl1pPr>
               <a:defRPr sz="900">
                 <a:solidFill>
-                  <a:srgbClr val="595959"/>
+                  <a:srgbClr val="5F6670"/>
                 </a:solidFill>
                 <a:latin typeface="Calibri"/>
                 <a:ea typeface="Calibri"/>
@@ -4938,7 +5356,7 @@
             <a:r>
               <a:rPr lang="en-US" sz="1000" b="1" spc="300" kern="0" dirty="0">
                 <a:solidFill>
-                  <a:srgbClr val="2E74B5"/>
+                  <a:srgbClr val="122B82"/>
                 </a:solidFill>
                 <a:latin typeface="Calibri" pitchFamily="34" charset="0"/>
                 <a:ea typeface="Calibri" pitchFamily="34" charset="-122"/>
@@ -4979,7 +5397,7 @@
             <a:r>
               <a:rPr lang="en-US" sz="2800" b="1" dirty="0">
                 <a:solidFill>
-                  <a:srgbClr val="1F4E79"/>
+                  <a:srgbClr val="121820"/>
                 </a:solidFill>
                 <a:latin typeface="Calibri" pitchFamily="34" charset="0"/>
                 <a:ea typeface="Calibri" pitchFamily="34" charset="-122"/>
@@ -5021,7 +5439,7 @@
             <a:lvl1pPr>
               <a:defRPr sz="900">
                 <a:solidFill>
-                  <a:srgbClr val="595959"/>
+                  <a:srgbClr val="5F6670"/>
                 </a:solidFill>
                 <a:latin typeface="Calibri"/>
                 <a:ea typeface="Calibri"/>
@@ -5093,7 +5511,7 @@
             <a:r>
               <a:rPr lang="en-US" sz="1000" b="1" spc="300" kern="0" dirty="0">
                 <a:solidFill>
-                  <a:srgbClr val="2E74B5"/>
+                  <a:srgbClr val="122B82"/>
                 </a:solidFill>
                 <a:latin typeface="Calibri" pitchFamily="34" charset="0"/>
                 <a:ea typeface="Calibri" pitchFamily="34" charset="-122"/>
@@ -5134,7 +5552,7 @@
             <a:r>
               <a:rPr lang="en-US" sz="2800" b="1" dirty="0">
                 <a:solidFill>
-                  <a:srgbClr val="1F4E79"/>
+                  <a:srgbClr val="121820"/>
                 </a:solidFill>
                 <a:latin typeface="Calibri" pitchFamily="34" charset="0"/>
                 <a:ea typeface="Calibri" pitchFamily="34" charset="-122"/>
@@ -5179,7 +5597,7 @@
             <a:r>
               <a:rPr lang="en-US" sz="1600" dirty="0">
                 <a:solidFill>
-                  <a:srgbClr val="262626"/>
+                  <a:srgbClr val="121820"/>
                 </a:solidFill>
                 <a:latin typeface="Calibri" pitchFamily="34" charset="0"/>
                 <a:ea typeface="Calibri" pitchFamily="34" charset="-122"/>
@@ -5200,7 +5618,7 @@
             <a:r>
               <a:rPr lang="en-US" sz="1600" dirty="0">
                 <a:solidFill>
-                  <a:srgbClr val="262626"/>
+                  <a:srgbClr val="121820"/>
                 </a:solidFill>
                 <a:latin typeface="Calibri" pitchFamily="34" charset="0"/>
                 <a:ea typeface="Calibri" pitchFamily="34" charset="-122"/>
@@ -5221,7 +5639,7 @@
             <a:r>
               <a:rPr lang="en-US" sz="1600" dirty="0">
                 <a:solidFill>
-                  <a:srgbClr val="262626"/>
+                  <a:srgbClr val="121820"/>
                 </a:solidFill>
                 <a:latin typeface="Calibri" pitchFamily="34" charset="0"/>
                 <a:ea typeface="Calibri" pitchFamily="34" charset="-122"/>
@@ -5242,7 +5660,7 @@
             <a:r>
               <a:rPr lang="en-US" sz="1600" dirty="0">
                 <a:solidFill>
-                  <a:srgbClr val="262626"/>
+                  <a:srgbClr val="121820"/>
                 </a:solidFill>
                 <a:latin typeface="Calibri" pitchFamily="34" charset="0"/>
                 <a:ea typeface="Calibri" pitchFamily="34" charset="-122"/>
@@ -5284,7 +5702,7 @@
             <a:lvl1pPr>
               <a:defRPr sz="900">
                 <a:solidFill>
-                  <a:srgbClr val="595959"/>
+                  <a:srgbClr val="5F6670"/>
                 </a:solidFill>
                 <a:latin typeface="Calibri"/>
                 <a:ea typeface="Calibri"/>
@@ -5356,7 +5774,7 @@
             <a:r>
               <a:rPr lang="en-US" sz="1000" b="1" spc="300" kern="0" dirty="0">
                 <a:solidFill>
-                  <a:srgbClr val="2E74B5"/>
+                  <a:srgbClr val="122B82"/>
                 </a:solidFill>
                 <a:latin typeface="Calibri" pitchFamily="34" charset="0"/>
                 <a:ea typeface="Calibri" pitchFamily="34" charset="-122"/>
@@ -5397,7 +5815,7 @@
             <a:r>
               <a:rPr lang="en-US" sz="2800" b="1" dirty="0">
                 <a:solidFill>
-                  <a:srgbClr val="1F4E79"/>
+                  <a:srgbClr val="121820"/>
                 </a:solidFill>
                 <a:latin typeface="Calibri" pitchFamily="34" charset="0"/>
                 <a:ea typeface="Calibri" pitchFamily="34" charset="-122"/>
@@ -5439,7 +5857,7 @@
             <a:r>
               <a:rPr lang="en-US" sz="1600" dirty="0">
                 <a:solidFill>
-                  <a:srgbClr val="262626"/>
+                  <a:srgbClr val="121820"/>
                 </a:solidFill>
                 <a:latin typeface="Calibri" pitchFamily="34" charset="0"/>
                 <a:ea typeface="Calibri" pitchFamily="34" charset="-122"/>
@@ -5469,7 +5887,7 @@
             <a:r>
               <a:rPr lang="en-US" sz="1600" dirty="0">
                 <a:solidFill>
-                  <a:srgbClr val="262626"/>
+                  <a:srgbClr val="121820"/>
                 </a:solidFill>
                 <a:latin typeface="Calibri" pitchFamily="34" charset="0"/>
                 <a:ea typeface="Calibri" pitchFamily="34" charset="-122"/>
@@ -5490,7 +5908,7 @@
             <a:r>
               <a:rPr lang="en-US" sz="1600" dirty="0">
                 <a:solidFill>
-                  <a:srgbClr val="262626"/>
+                  <a:srgbClr val="121820"/>
                 </a:solidFill>
                 <a:latin typeface="Calibri" pitchFamily="34" charset="0"/>
                 <a:ea typeface="Calibri" pitchFamily="34" charset="-122"/>
@@ -5511,7 +5929,7 @@
             <a:r>
               <a:rPr lang="en-US" sz="1600" dirty="0">
                 <a:solidFill>
-                  <a:srgbClr val="262626"/>
+                  <a:srgbClr val="121820"/>
                 </a:solidFill>
                 <a:latin typeface="Calibri" pitchFamily="34" charset="0"/>
                 <a:ea typeface="Calibri" pitchFamily="34" charset="-122"/>
@@ -5534,17 +5952,15 @@
             <a:off x="5303520" y="1554480"/>
             <a:ext cx="3337560" cy="3017520"/>
           </a:xfrm>
-          <a:prstGeom prst="roundRect">
-            <a:avLst>
-              <a:gd name="adj" fmla="val 4848"/>
-            </a:avLst>
+          <a:prstGeom prst="rect">
+            <a:avLst/>
           </a:prstGeom>
           <a:solidFill>
-            <a:srgbClr val="D9E2F3"/>
+            <a:srgbClr val="E8F9F8"/>
           </a:solidFill>
           <a:ln w="12700">
             <a:solidFill>
-              <a:srgbClr val="D9E2F3"/>
+              <a:srgbClr val="E8F9F8"/>
             </a:solidFill>
             <a:prstDash val="solid"/>
           </a:ln>
@@ -5577,7 +5993,7 @@
             <a:r>
               <a:rPr lang="en-US" sz="1000" b="1" spc="200" kern="0" dirty="0">
                 <a:solidFill>
-                  <a:srgbClr val="2E74B5"/>
+                  <a:srgbClr val="005358"/>
                 </a:solidFill>
                 <a:latin typeface="Calibri" pitchFamily="34" charset="0"/>
                 <a:ea typeface="Calibri" pitchFamily="34" charset="-122"/>
@@ -5616,7 +6032,7 @@
             <a:r>
               <a:rPr lang="en-US" sz="1800" b="1" dirty="0">
                 <a:solidFill>
-                  <a:srgbClr val="1F4E79"/>
+                  <a:srgbClr val="121820"/>
                 </a:solidFill>
                 <a:latin typeface="Calibri" pitchFamily="34" charset="0"/>
                 <a:ea typeface="Calibri" pitchFamily="34" charset="-122"/>
@@ -5655,7 +6071,7 @@
             <a:r>
               <a:rPr lang="en-US" sz="1100" dirty="0">
                 <a:solidFill>
-                  <a:srgbClr val="595959"/>
+                  <a:srgbClr val="5F6670"/>
                 </a:solidFill>
                 <a:latin typeface="Calibri" pitchFamily="34" charset="0"/>
                 <a:ea typeface="Calibri" pitchFamily="34" charset="-122"/>
@@ -5731,7 +6147,7 @@
             <a:lvl1pPr>
               <a:defRPr sz="900">
                 <a:solidFill>
-                  <a:srgbClr val="595959"/>
+                  <a:srgbClr val="5F6670"/>
                 </a:solidFill>
                 <a:latin typeface="Calibri"/>
                 <a:ea typeface="Calibri"/>

--- a/presentation/CTS Presentation Template.pptx
+++ b/presentation/CTS Presentation Template.pptx
@@ -1093,7 +1093,7 @@
           <a:p>
             <a:r>
               <a:rPr lang="en-US" dirty="0"/>
-              <a:t>Cover (dark) layout. The CTS mark on this layout is a placeholder. Replace it with the real logo file on the Slide Master (View &gt; Slide Master). The brand guidelines say the logo is always locked up with the promise "Seamless AV".</a:t>
+              <a:t>Cover (dark) layout. The CTS mark on this layout is a placeholder. Drop the real logo into presentation/assets/cts-logo.png (and cts-logo-dark.png for dark slides) and rebuild, or replace it on the Slide Master (View &gt; Slide Master).</a:t>
             </a:r>
             <a:endParaRPr lang="en-US" dirty="0"/>
           </a:p>
@@ -1181,7 +1181,7 @@
           <a:p>
             <a:r>
               <a:rPr lang="en-US" dirty="0"/>
-              <a:t>Cover (light) layout. The CTS mark on this layout is a placeholder. Replace it with the real logo file on the Slide Master (View &gt; Slide Master). The brand guidelines say the logo is always locked up with the promise "Seamless AV".</a:t>
+              <a:t>Cover (light) layout. The CTS mark on this layout is a placeholder. Drop the real logo into presentation/assets/cts-logo.png (and cts-logo-dark.png for dark slides) and rebuild, or replace it on the Slide Master (View &gt; Slide Master).</a:t>
             </a:r>
             <a:endParaRPr lang="en-US" dirty="0"/>
           </a:p>

--- a/presentation/CTS Presentation Template.pptx
+++ b/presentation/CTS Presentation Template.pptx
@@ -1093,7 +1093,7 @@
           <a:p>
             <a:r>
               <a:rPr lang="en-US" dirty="0"/>
-              <a:t>Cover (dark) layout. The CTS mark on this layout is a placeholder. Drop the real logo into presentation/assets/cts-logo.png (and cts-logo-dark.png for dark slides) and rebuild, or replace it on the Slide Master (View &gt; Slide Master).</a:t>
+              <a:t>Cover (dark) layout. Logo: the official CTS Seamless AV lock-up from presentation/assets (white on dark layouts, charcoal on white).</a:t>
             </a:r>
             <a:endParaRPr lang="en-US" dirty="0"/>
           </a:p>
@@ -1181,7 +1181,7 @@
           <a:p>
             <a:r>
               <a:rPr lang="en-US" dirty="0"/>
-              <a:t>Cover (light) layout. The CTS mark on this layout is a placeholder. Drop the real logo into presentation/assets/cts-logo.png (and cts-logo-dark.png for dark slides) and rebuild, or replace it on the Slide Master (View &gt; Slide Master).</a:t>
+              <a:t>Cover (light) layout. Logo: the official CTS Seamless AV lock-up from presentation/assets (white on dark layouts, charcoal on white).</a:t>
             </a:r>
             <a:endParaRPr lang="en-US" dirty="0"/>
           </a:p>
@@ -1892,154 +1892,36 @@
           </a:ln>
         </p:spPr>
       </p:sp>
-      <p:sp>
-        <p:nvSpPr>
-          <p:cNvPr id="5" name="Shape 3"/>
+      <p:pic>
+        <p:nvPicPr>
+          <p:cNvPr id="5" name="Image 0" descr="/home/user/Claude/presentation/assets/cts-logo-dark.png">    </p:cNvPr>
+          <p:cNvPicPr>
+            <a:picLocks noChangeAspect="1"/>
+          </p:cNvPicPr>
+          <p:nvPr/>
+        </p:nvPicPr>
+        <p:blipFill>
+          <a:blip r:embed="rId1"/>
+          <a:stretch>
+            <a:fillRect/>
+          </a:stretch>
+        </p:blipFill>
+        <p:spPr>
+          <a:xfrm>
+            <a:off x="502920" y="411480"/>
+            <a:ext cx="1143440" cy="777240"/>
+          </a:xfrm>
+          <a:prstGeom prst="rect">
+            <a:avLst/>
+          </a:prstGeom>
+        </p:spPr>
+      </p:pic>
+      <p:sp>
+        <p:nvSpPr>
+          <p:cNvPr id="6" name="Text 3"/>
           <p:cNvSpPr/>
-          <p:nvPr/>
-        </p:nvSpPr>
-        <p:spPr>
-          <a:xfrm>
-            <a:off x="502920" y="411480"/>
-            <a:ext cx="457200" cy="457200"/>
-          </a:xfrm>
-          <a:prstGeom prst="rect">
-            <a:avLst/>
-          </a:prstGeom>
-          <a:solidFill>
-            <a:srgbClr val="FFFFFF"/>
-          </a:solidFill>
-          <a:ln w="12700">
-            <a:solidFill>
-              <a:srgbClr val="FFFFFF"/>
-            </a:solidFill>
-            <a:prstDash val="solid"/>
-          </a:ln>
-        </p:spPr>
-      </p:sp>
-      <p:sp>
-        <p:nvSpPr>
-          <p:cNvPr id="6" name="Text 4"/>
-          <p:cNvSpPr/>
-          <p:nvPr/>
-        </p:nvSpPr>
-        <p:spPr>
-          <a:xfrm>
-            <a:off x="502920" y="411480"/>
-            <a:ext cx="457200" cy="457200"/>
-          </a:xfrm>
-          <a:prstGeom prst="rect">
-            <a:avLst/>
-          </a:prstGeom>
-          <a:noFill/>
-          <a:ln/>
-        </p:spPr>
-        <p:txBody>
-          <a:bodyPr wrap="square" lIns="0" tIns="0" rIns="0" bIns="0" rtlCol="0" anchor="ctr"/>
-          <a:lstStyle/>
-          <a:p>
-            <a:pPr algn="ctr" indent="0" marL="0">
-              <a:buNone/>
-            </a:pPr>
-            <a:r>
-              <a:rPr lang="en-US" sz="1300" b="1" spc="100" kern="0" dirty="0">
-                <a:solidFill>
-                  <a:srgbClr val="121820"/>
-                </a:solidFill>
-                <a:latin typeface="Calibri" pitchFamily="34" charset="0"/>
-                <a:ea typeface="Calibri" pitchFamily="34" charset="-122"/>
-                <a:cs typeface="Calibri" pitchFamily="34" charset="-120"/>
-              </a:rPr>
-              <a:t>CTS</a:t>
-            </a:r>
-            <a:endParaRPr lang="en-US" sz="1300" dirty="0"/>
-          </a:p>
-        </p:txBody>
-      </p:sp>
-      <p:sp>
-        <p:nvSpPr>
-          <p:cNvPr id="7" name="Text 5"/>
-          <p:cNvSpPr/>
-          <p:nvPr/>
-        </p:nvSpPr>
-        <p:spPr>
-          <a:xfrm>
-            <a:off x="1097280" y="393192"/>
-            <a:ext cx="3840480" cy="251460"/>
-          </a:xfrm>
-          <a:prstGeom prst="rect">
-            <a:avLst/>
-          </a:prstGeom>
-          <a:noFill/>
-          <a:ln/>
-        </p:spPr>
-        <p:txBody>
-          <a:bodyPr wrap="square" lIns="0" tIns="0" rIns="0" bIns="0" rtlCol="0" anchor="b"/>
-          <a:lstStyle/>
-          <a:p>
-            <a:pPr indent="0" marL="0">
-              <a:buNone/>
-            </a:pPr>
-            <a:r>
-              <a:rPr lang="en-US" sz="1200" b="1" dirty="0">
-                <a:solidFill>
-                  <a:srgbClr val="FFFFFF"/>
-                </a:solidFill>
-                <a:latin typeface="Calibri" pitchFamily="34" charset="0"/>
-                <a:ea typeface="Calibri" pitchFamily="34" charset="-122"/>
-                <a:cs typeface="Calibri" pitchFamily="34" charset="-120"/>
-              </a:rPr>
-              <a:t>Corporate Technology Services</a:t>
-            </a:r>
-            <a:endParaRPr lang="en-US" sz="1200" dirty="0"/>
-          </a:p>
-        </p:txBody>
-      </p:sp>
-      <p:sp>
-        <p:nvSpPr>
-          <p:cNvPr id="8" name="Text 6"/>
-          <p:cNvSpPr/>
-          <p:nvPr/>
-        </p:nvSpPr>
-        <p:spPr>
-          <a:xfrm>
-            <a:off x="1097280" y="653796"/>
-            <a:ext cx="3840480" cy="214884"/>
-          </a:xfrm>
-          <a:prstGeom prst="rect">
-            <a:avLst/>
-          </a:prstGeom>
-          <a:noFill/>
-          <a:ln/>
-        </p:spPr>
-        <p:txBody>
-          <a:bodyPr wrap="square" lIns="0" tIns="0" rIns="0" bIns="0" rtlCol="0" anchor="t"/>
-          <a:lstStyle/>
-          <a:p>
-            <a:pPr indent="0" marL="0">
-              <a:buNone/>
-            </a:pPr>
-            <a:r>
-              <a:rPr lang="en-US" sz="1000" dirty="0">
-                <a:solidFill>
-                  <a:srgbClr val="C9CED6"/>
-                </a:solidFill>
-                <a:latin typeface="Calibri" pitchFamily="34" charset="0"/>
-                <a:ea typeface="Calibri" pitchFamily="34" charset="-122"/>
-                <a:cs typeface="Calibri" pitchFamily="34" charset="-120"/>
-              </a:rPr>
-              <a:t>Seamless AV</a:t>
-            </a:r>
-            <a:endParaRPr lang="en-US" sz="1000" dirty="0"/>
-          </a:p>
-        </p:txBody>
-      </p:sp>
-      <p:sp>
-        <p:nvSpPr>
-          <p:cNvPr id="9" name="Text 7"/>
-          <p:cNvSpPr/>
-          <p:nvPr>
-            <p:ph idx="107" type="body" hasCustomPrompt="1"/>
+          <p:nvPr>
+            <p:ph idx="104" type="body" hasCustomPrompt="1"/>
           </p:nvPr>
         </p:nvSpPr>
         <p:spPr>
@@ -2089,10 +1971,10 @@
       </p:sp>
       <p:sp>
         <p:nvSpPr>
-          <p:cNvPr id="10" name="Text 7"/>
+          <p:cNvPr id="7" name="Text 3"/>
           <p:cNvSpPr/>
           <p:nvPr>
-            <p:ph idx="108" type="title" hasCustomPrompt="1"/>
+            <p:ph idx="105" type="title" hasCustomPrompt="1"/>
           </p:nvPr>
         </p:nvSpPr>
         <p:spPr>
@@ -2142,10 +2024,10 @@
       </p:sp>
       <p:sp>
         <p:nvSpPr>
-          <p:cNvPr id="11" name="Text 7"/>
+          <p:cNvPr id="8" name="Text 3"/>
           <p:cNvSpPr/>
           <p:nvPr>
-            <p:ph idx="109" type="body" hasCustomPrompt="1"/>
+            <p:ph idx="106" type="body" hasCustomPrompt="1"/>
           </p:nvPr>
         </p:nvSpPr>
         <p:spPr>
@@ -2195,10 +2077,10 @@
       </p:sp>
       <p:sp>
         <p:nvSpPr>
-          <p:cNvPr id="12" name="Text 7"/>
+          <p:cNvPr id="9" name="Text 3"/>
           <p:cNvSpPr/>
           <p:nvPr>
-            <p:ph idx="110" type="body" hasCustomPrompt="1"/>
+            <p:ph idx="107" type="body" hasCustomPrompt="1"/>
           </p:nvPr>
         </p:nvSpPr>
         <p:spPr>
@@ -2248,10 +2130,10 @@
       </p:sp>
       <p:sp>
         <p:nvSpPr>
-          <p:cNvPr id="13" name="Text 7"/>
+          <p:cNvPr id="10" name="Text 3"/>
           <p:cNvSpPr/>
           <p:nvPr>
-            <p:ph idx="111" type="body" hasCustomPrompt="1"/>
+            <p:ph idx="108" type="body" hasCustomPrompt="1"/>
           </p:nvPr>
         </p:nvSpPr>
         <p:spPr>
@@ -2468,154 +2350,36 @@
           </a:ln>
         </p:spPr>
       </p:sp>
-      <p:sp>
-        <p:nvSpPr>
-          <p:cNvPr id="7" name="Shape 5"/>
+      <p:pic>
+        <p:nvPicPr>
+          <p:cNvPr id="7" name="Image 0" descr="/home/user/Claude/presentation/assets/cts-logo.png">    </p:cNvPr>
+          <p:cNvPicPr>
+            <a:picLocks noChangeAspect="1"/>
+          </p:cNvPicPr>
+          <p:nvPr/>
+        </p:nvPicPr>
+        <p:blipFill>
+          <a:blip r:embed="rId1"/>
+          <a:stretch>
+            <a:fillRect/>
+          </a:stretch>
+        </p:blipFill>
+        <p:spPr>
+          <a:xfrm>
+            <a:off x="502920" y="411480"/>
+            <a:ext cx="1143440" cy="777240"/>
+          </a:xfrm>
+          <a:prstGeom prst="rect">
+            <a:avLst/>
+          </a:prstGeom>
+        </p:spPr>
+      </p:pic>
+      <p:sp>
+        <p:nvSpPr>
+          <p:cNvPr id="8" name="Text 5"/>
           <p:cNvSpPr/>
-          <p:nvPr/>
-        </p:nvSpPr>
-        <p:spPr>
-          <a:xfrm>
-            <a:off x="502920" y="411480"/>
-            <a:ext cx="457200" cy="457200"/>
-          </a:xfrm>
-          <a:prstGeom prst="rect">
-            <a:avLst/>
-          </a:prstGeom>
-          <a:solidFill>
-            <a:srgbClr val="121820"/>
-          </a:solidFill>
-          <a:ln w="12700">
-            <a:solidFill>
-              <a:srgbClr val="121820"/>
-            </a:solidFill>
-            <a:prstDash val="solid"/>
-          </a:ln>
-        </p:spPr>
-      </p:sp>
-      <p:sp>
-        <p:nvSpPr>
-          <p:cNvPr id="8" name="Text 6"/>
-          <p:cNvSpPr/>
-          <p:nvPr/>
-        </p:nvSpPr>
-        <p:spPr>
-          <a:xfrm>
-            <a:off x="502920" y="411480"/>
-            <a:ext cx="457200" cy="457200"/>
-          </a:xfrm>
-          <a:prstGeom prst="rect">
-            <a:avLst/>
-          </a:prstGeom>
-          <a:noFill/>
-          <a:ln/>
-        </p:spPr>
-        <p:txBody>
-          <a:bodyPr wrap="square" lIns="0" tIns="0" rIns="0" bIns="0" rtlCol="0" anchor="ctr"/>
-          <a:lstStyle/>
-          <a:p>
-            <a:pPr algn="ctr" indent="0" marL="0">
-              <a:buNone/>
-            </a:pPr>
-            <a:r>
-              <a:rPr lang="en-US" sz="1300" b="1" spc="100" kern="0" dirty="0">
-                <a:solidFill>
-                  <a:srgbClr val="FFFFFF"/>
-                </a:solidFill>
-                <a:latin typeface="Calibri" pitchFamily="34" charset="0"/>
-                <a:ea typeface="Calibri" pitchFamily="34" charset="-122"/>
-                <a:cs typeface="Calibri" pitchFamily="34" charset="-120"/>
-              </a:rPr>
-              <a:t>CTS</a:t>
-            </a:r>
-            <a:endParaRPr lang="en-US" sz="1300" dirty="0"/>
-          </a:p>
-        </p:txBody>
-      </p:sp>
-      <p:sp>
-        <p:nvSpPr>
-          <p:cNvPr id="9" name="Text 7"/>
-          <p:cNvSpPr/>
-          <p:nvPr/>
-        </p:nvSpPr>
-        <p:spPr>
-          <a:xfrm>
-            <a:off x="1097280" y="393192"/>
-            <a:ext cx="3840480" cy="251460"/>
-          </a:xfrm>
-          <a:prstGeom prst="rect">
-            <a:avLst/>
-          </a:prstGeom>
-          <a:noFill/>
-          <a:ln/>
-        </p:spPr>
-        <p:txBody>
-          <a:bodyPr wrap="square" lIns="0" tIns="0" rIns="0" bIns="0" rtlCol="0" anchor="b"/>
-          <a:lstStyle/>
-          <a:p>
-            <a:pPr indent="0" marL="0">
-              <a:buNone/>
-            </a:pPr>
-            <a:r>
-              <a:rPr lang="en-US" sz="1200" b="1" dirty="0">
-                <a:solidFill>
-                  <a:srgbClr val="121820"/>
-                </a:solidFill>
-                <a:latin typeface="Calibri" pitchFamily="34" charset="0"/>
-                <a:ea typeface="Calibri" pitchFamily="34" charset="-122"/>
-                <a:cs typeface="Calibri" pitchFamily="34" charset="-120"/>
-              </a:rPr>
-              <a:t>Corporate Technology Services</a:t>
-            </a:r>
-            <a:endParaRPr lang="en-US" sz="1200" dirty="0"/>
-          </a:p>
-        </p:txBody>
-      </p:sp>
-      <p:sp>
-        <p:nvSpPr>
-          <p:cNvPr id="10" name="Text 8"/>
-          <p:cNvSpPr/>
-          <p:nvPr/>
-        </p:nvSpPr>
-        <p:spPr>
-          <a:xfrm>
-            <a:off x="1097280" y="653796"/>
-            <a:ext cx="3840480" cy="214884"/>
-          </a:xfrm>
-          <a:prstGeom prst="rect">
-            <a:avLst/>
-          </a:prstGeom>
-          <a:noFill/>
-          <a:ln/>
-        </p:spPr>
-        <p:txBody>
-          <a:bodyPr wrap="square" lIns="0" tIns="0" rIns="0" bIns="0" rtlCol="0" anchor="t"/>
-          <a:lstStyle/>
-          <a:p>
-            <a:pPr indent="0" marL="0">
-              <a:buNone/>
-            </a:pPr>
-            <a:r>
-              <a:rPr lang="en-US" sz="1000" dirty="0">
-                <a:solidFill>
-                  <a:srgbClr val="5F6670"/>
-                </a:solidFill>
-                <a:latin typeface="Calibri" pitchFamily="34" charset="0"/>
-                <a:ea typeface="Calibri" pitchFamily="34" charset="-122"/>
-                <a:cs typeface="Calibri" pitchFamily="34" charset="-120"/>
-              </a:rPr>
-              <a:t>Seamless AV</a:t>
-            </a:r>
-            <a:endParaRPr lang="en-US" sz="1000" dirty="0"/>
-          </a:p>
-        </p:txBody>
-      </p:sp>
-      <p:sp>
-        <p:nvSpPr>
-          <p:cNvPr id="11" name="Text 9"/>
-          <p:cNvSpPr/>
-          <p:nvPr>
-            <p:ph idx="109" type="body" hasCustomPrompt="1"/>
+          <p:nvPr>
+            <p:ph idx="106" type="body" hasCustomPrompt="1"/>
           </p:nvPr>
         </p:nvSpPr>
         <p:spPr>
@@ -2665,10 +2429,10 @@
       </p:sp>
       <p:sp>
         <p:nvSpPr>
-          <p:cNvPr id="12" name="Text 9"/>
+          <p:cNvPr id="9" name="Text 5"/>
           <p:cNvSpPr/>
           <p:nvPr>
-            <p:ph idx="110" type="title" hasCustomPrompt="1"/>
+            <p:ph idx="107" type="title" hasCustomPrompt="1"/>
           </p:nvPr>
         </p:nvSpPr>
         <p:spPr>
@@ -2718,10 +2482,10 @@
       </p:sp>
       <p:sp>
         <p:nvSpPr>
-          <p:cNvPr id="13" name="Text 9"/>
+          <p:cNvPr id="10" name="Text 5"/>
           <p:cNvSpPr/>
           <p:nvPr>
-            <p:ph idx="111" type="body" hasCustomPrompt="1"/>
+            <p:ph idx="108" type="body" hasCustomPrompt="1"/>
           </p:nvPr>
         </p:nvSpPr>
         <p:spPr>
@@ -2771,10 +2535,10 @@
       </p:sp>
       <p:sp>
         <p:nvSpPr>
-          <p:cNvPr id="14" name="Text 9"/>
+          <p:cNvPr id="11" name="Text 5"/>
           <p:cNvSpPr/>
           <p:nvPr>
-            <p:ph idx="112" type="body" hasCustomPrompt="1"/>
+            <p:ph idx="109" type="body" hasCustomPrompt="1"/>
           </p:nvPr>
         </p:nvSpPr>
         <p:spPr>
@@ -2824,10 +2588,10 @@
       </p:sp>
       <p:sp>
         <p:nvSpPr>
-          <p:cNvPr id="15" name="Text 9"/>
+          <p:cNvPr id="12" name="Text 5"/>
           <p:cNvSpPr/>
           <p:nvPr>
-            <p:ph idx="113" type="body" hasCustomPrompt="1"/>
+            <p:ph idx="110" type="body" hasCustomPrompt="1"/>
           </p:nvPr>
         </p:nvSpPr>
         <p:spPr>
@@ -2975,73 +2739,33 @@
           </a:p>
         </p:txBody>
       </p:sp>
-      <p:sp>
-        <p:nvSpPr>
-          <p:cNvPr id="4" name="Shape 2"/>
-          <p:cNvSpPr/>
+      <p:pic>
+        <p:nvPicPr>
+          <p:cNvPr id="4" name="Image 0" descr="/home/user/Claude/presentation/assets/cts-logo-dark.png">    </p:cNvPr>
+          <p:cNvPicPr>
+            <a:picLocks noChangeAspect="1"/>
+          </p:cNvPicPr>
           <p:nvPr/>
-        </p:nvSpPr>
-        <p:spPr>
-          <a:xfrm>
-            <a:off x="8257032" y="384048"/>
-            <a:ext cx="384048" cy="384048"/>
-          </a:xfrm>
-          <a:prstGeom prst="rect">
-            <a:avLst/>
-          </a:prstGeom>
-          <a:solidFill>
-            <a:srgbClr val="FFFFFF"/>
-          </a:solidFill>
-          <a:ln w="12700">
-            <a:solidFill>
-              <a:srgbClr val="FFFFFF"/>
-            </a:solidFill>
-            <a:prstDash val="solid"/>
-          </a:ln>
-        </p:spPr>
-      </p:sp>
-      <p:sp>
-        <p:nvSpPr>
-          <p:cNvPr id="5" name="Text 3"/>
-          <p:cNvSpPr/>
-          <p:nvPr/>
-        </p:nvSpPr>
-        <p:spPr>
-          <a:xfrm>
-            <a:off x="8257032" y="384048"/>
-            <a:ext cx="384048" cy="384048"/>
-          </a:xfrm>
-          <a:prstGeom prst="rect">
-            <a:avLst/>
-          </a:prstGeom>
-          <a:noFill/>
-          <a:ln/>
-        </p:spPr>
-        <p:txBody>
-          <a:bodyPr wrap="square" lIns="0" tIns="0" rIns="0" bIns="0" rtlCol="0" anchor="ctr"/>
-          <a:lstStyle/>
-          <a:p>
-            <a:pPr algn="ctr" indent="0" marL="0">
-              <a:buNone/>
-            </a:pPr>
-            <a:r>
-              <a:rPr lang="en-US" sz="1092" b="1" spc="100" kern="0" dirty="0">
-                <a:solidFill>
-                  <a:srgbClr val="121820"/>
-                </a:solidFill>
-                <a:latin typeface="Calibri" pitchFamily="34" charset="0"/>
-                <a:ea typeface="Calibri" pitchFamily="34" charset="-122"/>
-                <a:cs typeface="Calibri" pitchFamily="34" charset="-120"/>
-              </a:rPr>
-              <a:t>CTS</a:t>
-            </a:r>
-            <a:endParaRPr lang="en-US" sz="1092" dirty="0"/>
-          </a:p>
-        </p:txBody>
-      </p:sp>
-      <p:sp>
-        <p:nvSpPr>
-          <p:cNvPr id="6" name="Shape 4"/>
+        </p:nvPicPr>
+        <p:blipFill>
+          <a:blip r:embed="rId1"/>
+          <a:stretch>
+            <a:fillRect/>
+          </a:stretch>
+        </p:blipFill>
+        <p:spPr>
+          <a:xfrm>
+            <a:off x="7850089" y="384048"/>
+            <a:ext cx="790991" cy="537667"/>
+          </a:xfrm>
+          <a:prstGeom prst="rect">
+            <a:avLst/>
+          </a:prstGeom>
+        </p:spPr>
+      </p:pic>
+      <p:sp>
+        <p:nvSpPr>
+          <p:cNvPr id="5" name="Shape 2"/>
           <p:cNvSpPr/>
           <p:nvPr/>
         </p:nvSpPr>
@@ -3066,10 +2790,10 @@
       </p:sp>
       <p:sp>
         <p:nvSpPr>
-          <p:cNvPr id="7" name="Text 5"/>
+          <p:cNvPr id="6" name="Text 3"/>
           <p:cNvSpPr/>
           <p:nvPr>
-            <p:ph idx="105" type="body" hasCustomPrompt="1"/>
+            <p:ph idx="104" type="body" hasCustomPrompt="1"/>
           </p:nvPr>
         </p:nvSpPr>
         <p:spPr>
@@ -3119,10 +2843,10 @@
       </p:sp>
       <p:sp>
         <p:nvSpPr>
-          <p:cNvPr id="8" name="Text 5"/>
+          <p:cNvPr id="7" name="Text 3"/>
           <p:cNvSpPr/>
           <p:nvPr>
-            <p:ph idx="106" type="title" hasCustomPrompt="1"/>
+            <p:ph idx="105" type="title" hasCustomPrompt="1"/>
           </p:nvPr>
         </p:nvSpPr>
         <p:spPr>
@@ -3172,10 +2896,10 @@
       </p:sp>
       <p:sp>
         <p:nvSpPr>
-          <p:cNvPr id="9" name="Text 5"/>
+          <p:cNvPr id="8" name="Text 3"/>
           <p:cNvSpPr/>
           <p:nvPr>
-            <p:ph idx="107" type="body" hasCustomPrompt="1"/>
+            <p:ph idx="106" type="body" hasCustomPrompt="1"/>
           </p:nvPr>
         </p:nvSpPr>
         <p:spPr>
@@ -3225,7 +2949,7 @@
       </p:sp>
       <p:sp>
         <p:nvSpPr>
-          <p:cNvPr id="10" name="Text 5"/>
+          <p:cNvPr id="9" name="Text 3"/>
           <p:cNvSpPr/>
           <p:nvPr/>
         </p:nvSpPr>
@@ -3448,73 +3172,33 @@
           </a:p>
         </p:txBody>
       </p:sp>
-      <p:sp>
-        <p:nvSpPr>
-          <p:cNvPr id="4" name="Shape 0"/>
-          <p:cNvSpPr/>
+      <p:pic>
+        <p:nvPicPr>
+          <p:cNvPr id="4" name="Image 0" descr="/home/user/Claude/presentation/assets/cts-logo.png">    </p:cNvPr>
+          <p:cNvPicPr>
+            <a:picLocks noChangeAspect="1"/>
+          </p:cNvPicPr>
           <p:nvPr/>
-        </p:nvSpPr>
-        <p:spPr>
-          <a:xfrm>
-            <a:off x="8257032" y="384048"/>
-            <a:ext cx="384048" cy="384048"/>
-          </a:xfrm>
-          <a:prstGeom prst="rect">
-            <a:avLst/>
-          </a:prstGeom>
-          <a:solidFill>
-            <a:srgbClr val="121820"/>
-          </a:solidFill>
-          <a:ln w="12700">
-            <a:solidFill>
-              <a:srgbClr val="121820"/>
-            </a:solidFill>
-            <a:prstDash val="solid"/>
-          </a:ln>
-        </p:spPr>
-      </p:sp>
-      <p:sp>
-        <p:nvSpPr>
-          <p:cNvPr id="5" name="Text 1"/>
-          <p:cNvSpPr/>
-          <p:nvPr/>
-        </p:nvSpPr>
-        <p:spPr>
-          <a:xfrm>
-            <a:off x="8257032" y="384048"/>
-            <a:ext cx="384048" cy="384048"/>
-          </a:xfrm>
-          <a:prstGeom prst="rect">
-            <a:avLst/>
-          </a:prstGeom>
-          <a:noFill/>
-          <a:ln/>
-        </p:spPr>
-        <p:txBody>
-          <a:bodyPr wrap="square" lIns="0" tIns="0" rIns="0" bIns="0" rtlCol="0" anchor="ctr"/>
-          <a:lstStyle/>
-          <a:p>
-            <a:pPr algn="ctr" indent="0" marL="0">
-              <a:buNone/>
-            </a:pPr>
-            <a:r>
-              <a:rPr lang="en-US" sz="1092" b="1" spc="100" kern="0" dirty="0">
-                <a:solidFill>
-                  <a:srgbClr val="FFFFFF"/>
-                </a:solidFill>
-                <a:latin typeface="Calibri" pitchFamily="34" charset="0"/>
-                <a:ea typeface="Calibri" pitchFamily="34" charset="-122"/>
-                <a:cs typeface="Calibri" pitchFamily="34" charset="-120"/>
-              </a:rPr>
-              <a:t>CTS</a:t>
-            </a:r>
-            <a:endParaRPr lang="en-US" sz="1092" dirty="0"/>
-          </a:p>
-        </p:txBody>
-      </p:sp>
-      <p:sp>
-        <p:nvSpPr>
-          <p:cNvPr id="6" name="Text 2"/>
+        </p:nvPicPr>
+        <p:blipFill>
+          <a:blip r:embed="rId1"/>
+          <a:stretch>
+            <a:fillRect/>
+          </a:stretch>
+        </p:blipFill>
+        <p:spPr>
+          <a:xfrm>
+            <a:off x="7850089" y="384048"/>
+            <a:ext cx="790991" cy="537667"/>
+          </a:xfrm>
+          <a:prstGeom prst="rect">
+            <a:avLst/>
+          </a:prstGeom>
+        </p:spPr>
+      </p:pic>
+      <p:sp>
+        <p:nvSpPr>
+          <p:cNvPr id="5" name="Text 0"/>
           <p:cNvSpPr/>
           <p:nvPr/>
         </p:nvSpPr>
@@ -3737,41 +3421,40 @@
           </a:p>
         </p:txBody>
       </p:sp>
-      <p:sp>
-        <p:nvSpPr>
-          <p:cNvPr id="4" name="Shape 0"/>
+      <p:pic>
+        <p:nvPicPr>
+          <p:cNvPr id="4" name="Image 0" descr="/home/user/Claude/presentation/assets/cts-logo.png">    </p:cNvPr>
+          <p:cNvPicPr>
+            <a:picLocks noChangeAspect="1"/>
+          </p:cNvPicPr>
+          <p:nvPr/>
+        </p:nvPicPr>
+        <p:blipFill>
+          <a:blip r:embed="rId1"/>
+          <a:stretch>
+            <a:fillRect/>
+          </a:stretch>
+        </p:blipFill>
+        <p:spPr>
+          <a:xfrm>
+            <a:off x="7850089" y="384048"/>
+            <a:ext cx="790991" cy="537667"/>
+          </a:xfrm>
+          <a:prstGeom prst="rect">
+            <a:avLst/>
+          </a:prstGeom>
+        </p:spPr>
+      </p:pic>
+      <p:sp>
+        <p:nvSpPr>
+          <p:cNvPr id="5" name="Text 0"/>
           <p:cNvSpPr/>
           <p:nvPr/>
         </p:nvSpPr>
         <p:spPr>
           <a:xfrm>
-            <a:off x="8257032" y="384048"/>
-            <a:ext cx="384048" cy="384048"/>
-          </a:xfrm>
-          <a:prstGeom prst="rect">
-            <a:avLst/>
-          </a:prstGeom>
-          <a:solidFill>
-            <a:srgbClr val="121820"/>
-          </a:solidFill>
-          <a:ln w="12700">
-            <a:solidFill>
-              <a:srgbClr val="121820"/>
-            </a:solidFill>
-            <a:prstDash val="solid"/>
-          </a:ln>
-        </p:spPr>
-      </p:sp>
-      <p:sp>
-        <p:nvSpPr>
-          <p:cNvPr id="5" name="Text 1"/>
-          <p:cNvSpPr/>
-          <p:nvPr/>
-        </p:nvSpPr>
-        <p:spPr>
-          <a:xfrm>
-            <a:off x="8257032" y="384048"/>
-            <a:ext cx="384048" cy="384048"/>
+            <a:off x="502920" y="4759452"/>
+            <a:ext cx="4114800" cy="228600"/>
           </a:xfrm>
           <a:prstGeom prst="rect">
             <a:avLst/>
@@ -3783,45 +3466,6 @@
           <a:bodyPr wrap="square" lIns="0" tIns="0" rIns="0" bIns="0" rtlCol="0" anchor="ctr"/>
           <a:lstStyle/>
           <a:p>
-            <a:pPr algn="ctr" indent="0" marL="0">
-              <a:buNone/>
-            </a:pPr>
-            <a:r>
-              <a:rPr lang="en-US" sz="1092" b="1" spc="100" kern="0" dirty="0">
-                <a:solidFill>
-                  <a:srgbClr val="FFFFFF"/>
-                </a:solidFill>
-                <a:latin typeface="Calibri" pitchFamily="34" charset="0"/>
-                <a:ea typeface="Calibri" pitchFamily="34" charset="-122"/>
-                <a:cs typeface="Calibri" pitchFamily="34" charset="-120"/>
-              </a:rPr>
-              <a:t>CTS</a:t>
-            </a:r>
-            <a:endParaRPr lang="en-US" sz="1092" dirty="0"/>
-          </a:p>
-        </p:txBody>
-      </p:sp>
-      <p:sp>
-        <p:nvSpPr>
-          <p:cNvPr id="6" name="Text 2"/>
-          <p:cNvSpPr/>
-          <p:nvPr/>
-        </p:nvSpPr>
-        <p:spPr>
-          <a:xfrm>
-            <a:off x="502920" y="4759452"/>
-            <a:ext cx="4114800" cy="228600"/>
-          </a:xfrm>
-          <a:prstGeom prst="rect">
-            <a:avLst/>
-          </a:prstGeom>
-          <a:noFill/>
-          <a:ln/>
-        </p:spPr>
-        <p:txBody>
-          <a:bodyPr wrap="square" lIns="0" tIns="0" rIns="0" bIns="0" rtlCol="0" anchor="ctr"/>
-          <a:lstStyle/>
-          <a:p>
             <a:pPr indent="0" marL="0">
               <a:buNone/>
             </a:pPr>
@@ -3842,10 +3486,10 @@
       </p:sp>
       <p:sp>
         <p:nvSpPr>
-          <p:cNvPr id="7" name="Text 3"/>
+          <p:cNvPr id="6" name="Text 1"/>
           <p:cNvSpPr/>
           <p:nvPr>
-            <p:ph idx="105" type="body" hasCustomPrompt="1"/>
+            <p:ph idx="104" type="body" hasCustomPrompt="1"/>
           </p:nvPr>
         </p:nvSpPr>
         <p:spPr>
@@ -4306,10 +3950,10 @@
       </p:grpSpPr>
       <p:sp>
         <p:nvSpPr>
-          <p:cNvPr id="2" name="Text 7"/>
+          <p:cNvPr id="2" name="Text 3"/>
           <p:cNvSpPr/>
           <p:nvPr>
-            <p:ph idx="107" type="body" hasCustomPrompt="1"/>
+            <p:ph idx="104" type="body" hasCustomPrompt="1"/>
           </p:nvPr>
         </p:nvSpPr>
         <p:spPr>
@@ -4347,10 +3991,10 @@
       </p:sp>
       <p:sp>
         <p:nvSpPr>
-          <p:cNvPr id="3" name="Text 7"/>
+          <p:cNvPr id="3" name="Text 3"/>
           <p:cNvSpPr/>
           <p:nvPr>
-            <p:ph idx="108" type="title" hasCustomPrompt="1"/>
+            <p:ph idx="105" type="title" hasCustomPrompt="1"/>
           </p:nvPr>
         </p:nvSpPr>
         <p:spPr>
@@ -4388,10 +4032,10 @@
       </p:sp>
       <p:sp>
         <p:nvSpPr>
-          <p:cNvPr id="4" name="Text 7"/>
+          <p:cNvPr id="4" name="Text 3"/>
           <p:cNvSpPr/>
           <p:nvPr>
-            <p:ph idx="109" type="body" hasCustomPrompt="1"/>
+            <p:ph idx="106" type="body" hasCustomPrompt="1"/>
           </p:nvPr>
         </p:nvSpPr>
         <p:spPr>
@@ -4429,10 +4073,10 @@
       </p:sp>
       <p:sp>
         <p:nvSpPr>
-          <p:cNvPr id="5" name="Text 7"/>
+          <p:cNvPr id="5" name="Text 3"/>
           <p:cNvSpPr/>
           <p:nvPr>
-            <p:ph idx="110" type="body" hasCustomPrompt="1"/>
+            <p:ph idx="107" type="body" hasCustomPrompt="1"/>
           </p:nvPr>
         </p:nvSpPr>
         <p:spPr>
@@ -4470,10 +4114,10 @@
       </p:sp>
       <p:sp>
         <p:nvSpPr>
-          <p:cNvPr id="6" name="Text 7"/>
+          <p:cNvPr id="6" name="Text 3"/>
           <p:cNvSpPr/>
           <p:nvPr>
-            <p:ph idx="111" type="body" hasCustomPrompt="1"/>
+            <p:ph idx="108" type="body" hasCustomPrompt="1"/>
           </p:nvPr>
         </p:nvSpPr>
         <p:spPr>
@@ -4536,10 +4180,10 @@
       </p:grpSpPr>
       <p:sp>
         <p:nvSpPr>
-          <p:cNvPr id="2" name="Text 9"/>
+          <p:cNvPr id="2" name="Text 5"/>
           <p:cNvSpPr/>
           <p:nvPr>
-            <p:ph idx="109" type="body" hasCustomPrompt="1"/>
+            <p:ph idx="106" type="body" hasCustomPrompt="1"/>
           </p:nvPr>
         </p:nvSpPr>
         <p:spPr>
@@ -4577,10 +4221,10 @@
       </p:sp>
       <p:sp>
         <p:nvSpPr>
-          <p:cNvPr id="3" name="Text 9"/>
+          <p:cNvPr id="3" name="Text 5"/>
           <p:cNvSpPr/>
           <p:nvPr>
-            <p:ph idx="110" type="title" hasCustomPrompt="1"/>
+            <p:ph idx="107" type="title" hasCustomPrompt="1"/>
           </p:nvPr>
         </p:nvSpPr>
         <p:spPr>
@@ -4618,10 +4262,10 @@
       </p:sp>
       <p:sp>
         <p:nvSpPr>
-          <p:cNvPr id="4" name="Text 9"/>
+          <p:cNvPr id="4" name="Text 5"/>
           <p:cNvSpPr/>
           <p:nvPr>
-            <p:ph idx="111" type="body" hasCustomPrompt="1"/>
+            <p:ph idx="108" type="body" hasCustomPrompt="1"/>
           </p:nvPr>
         </p:nvSpPr>
         <p:spPr>
@@ -4659,10 +4303,10 @@
       </p:sp>
       <p:sp>
         <p:nvSpPr>
-          <p:cNvPr id="5" name="Text 9"/>
+          <p:cNvPr id="5" name="Text 5"/>
           <p:cNvSpPr/>
           <p:nvPr>
-            <p:ph idx="112" type="body" hasCustomPrompt="1"/>
+            <p:ph idx="109" type="body" hasCustomPrompt="1"/>
           </p:nvPr>
         </p:nvSpPr>
         <p:spPr>
@@ -4700,10 +4344,10 @@
       </p:sp>
       <p:sp>
         <p:nvSpPr>
-          <p:cNvPr id="6" name="Text 9"/>
+          <p:cNvPr id="6" name="Text 5"/>
           <p:cNvSpPr/>
           <p:nvPr>
-            <p:ph idx="113" type="body" hasCustomPrompt="1"/>
+            <p:ph idx="110" type="body" hasCustomPrompt="1"/>
           </p:nvPr>
         </p:nvSpPr>
         <p:spPr>
@@ -4766,10 +4410,10 @@
       </p:grpSpPr>
       <p:sp>
         <p:nvSpPr>
-          <p:cNvPr id="2" name="Text 5"/>
+          <p:cNvPr id="2" name="Text 3"/>
           <p:cNvSpPr/>
           <p:nvPr>
-            <p:ph idx="105" type="body" hasCustomPrompt="1"/>
+            <p:ph idx="104" type="body" hasCustomPrompt="1"/>
           </p:nvPr>
         </p:nvSpPr>
         <p:spPr>
@@ -4807,10 +4451,10 @@
       </p:sp>
       <p:sp>
         <p:nvSpPr>
-          <p:cNvPr id="3" name="Text 5"/>
+          <p:cNvPr id="3" name="Text 3"/>
           <p:cNvSpPr/>
           <p:nvPr>
-            <p:ph idx="106" type="title" hasCustomPrompt="1"/>
+            <p:ph idx="105" type="title" hasCustomPrompt="1"/>
           </p:nvPr>
         </p:nvSpPr>
         <p:spPr>
@@ -4848,10 +4492,10 @@
       </p:sp>
       <p:sp>
         <p:nvSpPr>
-          <p:cNvPr id="4" name="Text 5"/>
+          <p:cNvPr id="4" name="Text 3"/>
           <p:cNvSpPr/>
           <p:nvPr>
-            <p:ph idx="107" type="body" hasCustomPrompt="1"/>
+            <p:ph idx="106" type="body" hasCustomPrompt="1"/>
           </p:nvPr>
         </p:nvSpPr>
         <p:spPr>
@@ -4962,10 +4606,10 @@
       </p:grpSpPr>
       <p:sp>
         <p:nvSpPr>
-          <p:cNvPr id="2" name="Text 5"/>
+          <p:cNvPr id="2" name="Text 3"/>
           <p:cNvSpPr/>
           <p:nvPr>
-            <p:ph idx="105" type="body" hasCustomPrompt="1"/>
+            <p:ph idx="104" type="body" hasCustomPrompt="1"/>
           </p:nvPr>
         </p:nvSpPr>
         <p:spPr>
@@ -5003,10 +4647,10 @@
       </p:sp>
       <p:sp>
         <p:nvSpPr>
-          <p:cNvPr id="3" name="Text 5"/>
+          <p:cNvPr id="3" name="Text 3"/>
           <p:cNvSpPr/>
           <p:nvPr>
-            <p:ph idx="106" type="title" hasCustomPrompt="1"/>
+            <p:ph idx="105" type="title" hasCustomPrompt="1"/>
           </p:nvPr>
         </p:nvSpPr>
         <p:spPr>
@@ -5044,10 +4688,10 @@
       </p:sp>
       <p:sp>
         <p:nvSpPr>
-          <p:cNvPr id="4" name="Text 5"/>
+          <p:cNvPr id="4" name="Text 3"/>
           <p:cNvSpPr/>
           <p:nvPr>
-            <p:ph idx="107" type="body" hasCustomPrompt="1"/>
+            <p:ph idx="106" type="body" hasCustomPrompt="1"/>
           </p:nvPr>
         </p:nvSpPr>
         <p:spPr>
@@ -5566,10 +5210,10 @@
       </p:sp>
       <p:sp>
         <p:nvSpPr>
-          <p:cNvPr id="4" name="Text 3"/>
+          <p:cNvPr id="4" name="Text 1"/>
           <p:cNvSpPr/>
           <p:nvPr>
-            <p:ph idx="105" type="body" hasCustomPrompt="1"/>
+            <p:ph idx="104" type="body" hasCustomPrompt="1"/>
           </p:nvPr>
         </p:nvSpPr>
         <p:spPr>
@@ -6085,10 +5729,10 @@
       </p:sp>
       <p:sp>
         <p:nvSpPr>
-          <p:cNvPr id="10" name="Text 3"/>
+          <p:cNvPr id="10" name="Text 1"/>
           <p:cNvSpPr/>
           <p:nvPr>
-            <p:ph idx="105" type="body" hasCustomPrompt="1"/>
+            <p:ph idx="104" type="body" hasCustomPrompt="1"/>
           </p:nvPr>
         </p:nvSpPr>
         <p:spPr>

--- a/presentation/CTS Presentation Template.pptx
+++ b/presentation/CTS Presentation Template.pptx
@@ -3016,7 +3016,7 @@
               <a:buNone/>
               <a:defRPr lang="en-US" sz="4800" b="1" dirty="0">
                 <a:solidFill>
-                  <a:srgbClr val="121820"/>
+                  <a:srgbClr val="1A1A1A"/>
                 </a:solidFill>
                 <a:latin typeface="Calibri" pitchFamily="34" charset="0"/>
                 <a:ea typeface="Calibri" pitchFamily="34" charset="-122"/>
@@ -3031,7 +3031,7 @@
             <a:r>
               <a:rPr lang="en-US" sz="4800" b="1" dirty="0">
                 <a:solidFill>
-                  <a:srgbClr val="121820"/>
+                  <a:srgbClr val="1A1A1A"/>
                 </a:solidFill>
                 <a:latin typeface="Calibri" pitchFamily="34" charset="0"/>
                 <a:ea typeface="Calibri" pitchFamily="34" charset="-122"/>
@@ -3411,7 +3411,7 @@
               <a:buNone/>
               <a:defRPr lang="en-US" sz="4800" b="1" dirty="0">
                 <a:solidFill>
-                  <a:srgbClr val="121820"/>
+                  <a:srgbClr val="1A1A1A"/>
                 </a:solidFill>
                 <a:latin typeface="Calibri" pitchFamily="34" charset="0"/>
                 <a:ea typeface="Calibri" pitchFamily="34" charset="-122"/>
@@ -3426,7 +3426,7 @@
             <a:r>
               <a:rPr lang="en-US" sz="4800" b="1" dirty="0">
                 <a:solidFill>
-                  <a:srgbClr val="121820"/>
+                  <a:srgbClr val="1A1A1A"/>
                 </a:solidFill>
                 <a:latin typeface="Calibri" pitchFamily="34" charset="0"/>
                 <a:ea typeface="Calibri" pitchFamily="34" charset="-122"/>
@@ -3806,7 +3806,7 @@
               <a:buNone/>
               <a:defRPr lang="en-US" sz="4800" b="1" dirty="0">
                 <a:solidFill>
-                  <a:srgbClr val="121820"/>
+                  <a:srgbClr val="1A1A1A"/>
                 </a:solidFill>
                 <a:latin typeface="Calibri" pitchFamily="34" charset="0"/>
                 <a:ea typeface="Calibri" pitchFamily="34" charset="-122"/>
@@ -3821,7 +3821,7 @@
             <a:r>
               <a:rPr lang="en-US" sz="4800" b="1" dirty="0">
                 <a:solidFill>
-                  <a:srgbClr val="121820"/>
+                  <a:srgbClr val="1A1A1A"/>
                 </a:solidFill>
                 <a:latin typeface="Calibri" pitchFamily="34" charset="0"/>
                 <a:ea typeface="Calibri" pitchFamily="34" charset="-122"/>
@@ -4137,7 +4137,7 @@
               <a:buNone/>
               <a:defRPr lang="en-US" sz="2800" b="1" dirty="0">
                 <a:solidFill>
-                  <a:srgbClr val="121820"/>
+                  <a:srgbClr val="1A1A1A"/>
                 </a:solidFill>
                 <a:latin typeface="Calibri" pitchFamily="34" charset="0"/>
                 <a:ea typeface="Calibri" pitchFamily="34" charset="-122"/>
@@ -4152,7 +4152,7 @@
             <a:r>
               <a:rPr lang="en-US" sz="2800" b="1" dirty="0">
                 <a:solidFill>
-                  <a:srgbClr val="121820"/>
+                  <a:srgbClr val="1A1A1A"/>
                 </a:solidFill>
                 <a:latin typeface="Calibri" pitchFamily="34" charset="0"/>
                 <a:ea typeface="Calibri" pitchFamily="34" charset="-122"/>
@@ -4386,7 +4386,7 @@
               <a:buNone/>
               <a:defRPr lang="en-US" sz="2800" b="1" dirty="0">
                 <a:solidFill>
-                  <a:srgbClr val="121820"/>
+                  <a:srgbClr val="1A1A1A"/>
                 </a:solidFill>
                 <a:latin typeface="Calibri" pitchFamily="34" charset="0"/>
                 <a:ea typeface="Calibri" pitchFamily="34" charset="-122"/>
@@ -4401,7 +4401,7 @@
             <a:r>
               <a:rPr lang="en-US" sz="2800" b="1" dirty="0">
                 <a:solidFill>
-                  <a:srgbClr val="121820"/>
+                  <a:srgbClr val="1A1A1A"/>
                 </a:solidFill>
                 <a:latin typeface="Calibri" pitchFamily="34" charset="0"/>
                 <a:ea typeface="Calibri" pitchFamily="34" charset="-122"/>
@@ -4506,7 +4506,7 @@
               <a:buChar char="•"/>
               <a:defRPr lang="en-US" sz="1600" dirty="0">
                 <a:solidFill>
-                  <a:srgbClr val="121820"/>
+                  <a:srgbClr val="1A1A1A"/>
                 </a:solidFill>
                 <a:latin typeface="Calibri" pitchFamily="34" charset="0"/>
                 <a:ea typeface="Calibri" pitchFamily="34" charset="-122"/>
@@ -4525,7 +4525,7 @@
             <a:r>
               <a:rPr lang="en-US" sz="1600" dirty="0">
                 <a:solidFill>
-                  <a:srgbClr val="121820"/>
+                  <a:srgbClr val="1A1A1A"/>
                 </a:solidFill>
                 <a:latin typeface="Calibri" pitchFamily="34" charset="0"/>
                 <a:ea typeface="Calibri" pitchFamily="34" charset="-122"/>
@@ -4696,7 +4696,7 @@
               <a:buNone/>
               <a:defRPr lang="en-US" sz="2800" b="1" dirty="0">
                 <a:solidFill>
-                  <a:srgbClr val="121820"/>
+                  <a:srgbClr val="1A1A1A"/>
                 </a:solidFill>
                 <a:latin typeface="Calibri" pitchFamily="34" charset="0"/>
                 <a:ea typeface="Calibri" pitchFamily="34" charset="-122"/>
@@ -4711,7 +4711,7 @@
             <a:r>
               <a:rPr lang="en-US" sz="2800" b="1" dirty="0">
                 <a:solidFill>
-                  <a:srgbClr val="121820"/>
+                  <a:srgbClr val="1A1A1A"/>
                 </a:solidFill>
                 <a:latin typeface="Calibri" pitchFamily="34" charset="0"/>
                 <a:ea typeface="Calibri" pitchFamily="34" charset="-122"/>
@@ -4945,7 +4945,7 @@
               <a:buNone/>
               <a:defRPr lang="en-US" sz="2800" b="1" dirty="0">
                 <a:solidFill>
-                  <a:srgbClr val="121820"/>
+                  <a:srgbClr val="1A1A1A"/>
                 </a:solidFill>
                 <a:latin typeface="Calibri" pitchFamily="34" charset="0"/>
                 <a:ea typeface="Calibri" pitchFamily="34" charset="-122"/>
@@ -4960,7 +4960,7 @@
             <a:r>
               <a:rPr lang="en-US" sz="2800" b="1" dirty="0">
                 <a:solidFill>
-                  <a:srgbClr val="121820"/>
+                  <a:srgbClr val="1A1A1A"/>
                 </a:solidFill>
                 <a:latin typeface="Calibri" pitchFamily="34" charset="0"/>
                 <a:ea typeface="Calibri" pitchFamily="34" charset="-122"/>
@@ -5065,7 +5065,7 @@
               <a:buChar char="•"/>
               <a:defRPr lang="en-US" sz="1600" dirty="0">
                 <a:solidFill>
-                  <a:srgbClr val="121820"/>
+                  <a:srgbClr val="1A1A1A"/>
                 </a:solidFill>
                 <a:latin typeface="Calibri" pitchFamily="34" charset="0"/>
                 <a:ea typeface="Calibri" pitchFamily="34" charset="-122"/>
@@ -5084,7 +5084,7 @@
             <a:r>
               <a:rPr lang="en-US" sz="1600" dirty="0">
                 <a:solidFill>
-                  <a:srgbClr val="121820"/>
+                  <a:srgbClr val="1A1A1A"/>
                 </a:solidFill>
                 <a:latin typeface="Calibri" pitchFamily="34" charset="0"/>
                 <a:ea typeface="Calibri" pitchFamily="34" charset="-122"/>
@@ -5255,7 +5255,7 @@
               <a:buNone/>
               <a:defRPr lang="en-US" sz="2800" b="1" dirty="0">
                 <a:solidFill>
-                  <a:srgbClr val="121820"/>
+                  <a:srgbClr val="1A1A1A"/>
                 </a:solidFill>
                 <a:latin typeface="Calibri" pitchFamily="34" charset="0"/>
                 <a:ea typeface="Calibri" pitchFamily="34" charset="-122"/>
@@ -5270,7 +5270,7 @@
             <a:r>
               <a:rPr lang="en-US" sz="2800" b="1" dirty="0">
                 <a:solidFill>
-                  <a:srgbClr val="121820"/>
+                  <a:srgbClr val="1A1A1A"/>
                 </a:solidFill>
                 <a:latin typeface="Calibri" pitchFamily="34" charset="0"/>
                 <a:ea typeface="Calibri" pitchFamily="34" charset="-122"/>
@@ -5504,7 +5504,7 @@
               <a:buNone/>
               <a:defRPr lang="en-US" sz="2800" b="1" dirty="0">
                 <a:solidFill>
-                  <a:srgbClr val="121820"/>
+                  <a:srgbClr val="1A1A1A"/>
                 </a:solidFill>
                 <a:latin typeface="Calibri" pitchFamily="34" charset="0"/>
                 <a:ea typeface="Calibri" pitchFamily="34" charset="-122"/>
@@ -5519,7 +5519,7 @@
             <a:r>
               <a:rPr lang="en-US" sz="2800" b="1" dirty="0">
                 <a:solidFill>
-                  <a:srgbClr val="121820"/>
+                  <a:srgbClr val="1A1A1A"/>
                 </a:solidFill>
                 <a:latin typeface="Calibri" pitchFamily="34" charset="0"/>
                 <a:ea typeface="Calibri" pitchFamily="34" charset="-122"/>
@@ -5624,7 +5624,7 @@
               <a:buChar char="•"/>
               <a:defRPr lang="en-US" sz="1600" dirty="0">
                 <a:solidFill>
-                  <a:srgbClr val="121820"/>
+                  <a:srgbClr val="1A1A1A"/>
                 </a:solidFill>
                 <a:latin typeface="Calibri" pitchFamily="34" charset="0"/>
                 <a:ea typeface="Calibri" pitchFamily="34" charset="-122"/>
@@ -5643,7 +5643,7 @@
             <a:r>
               <a:rPr lang="en-US" sz="1600" dirty="0">
                 <a:solidFill>
-                  <a:srgbClr val="121820"/>
+                  <a:srgbClr val="1A1A1A"/>
                 </a:solidFill>
                 <a:latin typeface="Calibri" pitchFamily="34" charset="0"/>
                 <a:ea typeface="Calibri" pitchFamily="34" charset="-122"/>
@@ -5814,7 +5814,7 @@
               <a:buNone/>
               <a:defRPr lang="en-US" sz="2800" b="1" dirty="0">
                 <a:solidFill>
-                  <a:srgbClr val="121820"/>
+                  <a:srgbClr val="1A1A1A"/>
                 </a:solidFill>
                 <a:latin typeface="Calibri" pitchFamily="34" charset="0"/>
                 <a:ea typeface="Calibri" pitchFamily="34" charset="-122"/>
@@ -5829,7 +5829,7 @@
             <a:r>
               <a:rPr lang="en-US" sz="2800" b="1" dirty="0">
                 <a:solidFill>
-                  <a:srgbClr val="121820"/>
+                  <a:srgbClr val="1A1A1A"/>
                 </a:solidFill>
                 <a:latin typeface="Calibri" pitchFamily="34" charset="0"/>
                 <a:ea typeface="Calibri" pitchFamily="34" charset="-122"/>
@@ -5966,7 +5966,7 @@
     <p:bg>
       <p:bgPr>
         <a:solidFill>
-          <a:srgbClr val="121820"/>
+          <a:srgbClr val="1A1A1A"/>
         </a:solidFill>
       </p:bgPr>
     </p:bg>
@@ -6471,7 +6471,7 @@
               <a:buNone/>
               <a:defRPr lang="en-US" sz="2800" b="1" dirty="0">
                 <a:solidFill>
-                  <a:srgbClr val="121820"/>
+                  <a:srgbClr val="1A1A1A"/>
                 </a:solidFill>
                 <a:latin typeface="Calibri" pitchFamily="34" charset="0"/>
                 <a:ea typeface="Calibri" pitchFamily="34" charset="-122"/>
@@ -6486,7 +6486,7 @@
             <a:r>
               <a:rPr lang="en-US" sz="2800" b="1" dirty="0">
                 <a:solidFill>
-                  <a:srgbClr val="121820"/>
+                  <a:srgbClr val="1A1A1A"/>
                 </a:solidFill>
                 <a:latin typeface="Calibri" pitchFamily="34" charset="0"/>
                 <a:ea typeface="Calibri" pitchFamily="34" charset="-122"/>
@@ -6591,7 +6591,7 @@
               <a:buChar char="•"/>
               <a:defRPr lang="en-US" sz="1600" dirty="0">
                 <a:solidFill>
-                  <a:srgbClr val="121820"/>
+                  <a:srgbClr val="1A1A1A"/>
                 </a:solidFill>
                 <a:latin typeface="Calibri" pitchFamily="34" charset="0"/>
                 <a:ea typeface="Calibri" pitchFamily="34" charset="-122"/>
@@ -6610,7 +6610,7 @@
             <a:r>
               <a:rPr lang="en-US" sz="1600" dirty="0">
                 <a:solidFill>
-                  <a:srgbClr val="121820"/>
+                  <a:srgbClr val="1A1A1A"/>
                 </a:solidFill>
                 <a:latin typeface="Calibri" pitchFamily="34" charset="0"/>
                 <a:ea typeface="Calibri" pitchFamily="34" charset="-122"/>
@@ -6717,11 +6717,11 @@
             <a:avLst/>
           </a:prstGeom>
           <a:solidFill>
-            <a:srgbClr val="121820"/>
+            <a:srgbClr val="1A1A1A"/>
           </a:solidFill>
           <a:ln w="12700">
             <a:solidFill>
-              <a:srgbClr val="121820"/>
+              <a:srgbClr val="1A1A1A"/>
             </a:solidFill>
             <a:prstDash val="solid"/>
           </a:ln>
@@ -6942,7 +6942,7 @@
               <a:buNone/>
               <a:defRPr lang="en-US" sz="3600" b="1" dirty="0">
                 <a:solidFill>
-                  <a:srgbClr val="121820"/>
+                  <a:srgbClr val="1A1A1A"/>
                 </a:solidFill>
                 <a:latin typeface="Calibri" pitchFamily="34" charset="0"/>
                 <a:ea typeface="Calibri" pitchFamily="34" charset="-122"/>
@@ -6957,7 +6957,7 @@
             <a:r>
               <a:rPr lang="en-US" sz="3600" b="1" dirty="0">
                 <a:solidFill>
-                  <a:srgbClr val="121820"/>
+                  <a:srgbClr val="1A1A1A"/>
                 </a:solidFill>
                 <a:latin typeface="Calibri" pitchFamily="34" charset="0"/>
                 <a:ea typeface="Calibri" pitchFamily="34" charset="-122"/>
@@ -7142,7 +7142,7 @@
     <p:bg>
       <p:bgPr>
         <a:solidFill>
-          <a:srgbClr val="121820"/>
+          <a:srgbClr val="1A1A1A"/>
         </a:solidFill>
       </p:bgPr>
     </p:bg>
@@ -7492,7 +7492,7 @@
     <p:bg>
       <p:bgPr>
         <a:solidFill>
-          <a:srgbClr val="121820"/>
+          <a:srgbClr val="1A1A1A"/>
         </a:solidFill>
       </p:bgPr>
     </p:bg>
@@ -7871,7 +7871,7 @@
     <p:bg>
       <p:bgPr>
         <a:solidFill>
-          <a:srgbClr val="121820"/>
+          <a:srgbClr val="1A1A1A"/>
         </a:solidFill>
       </p:bgPr>
     </p:bg>
@@ -8250,7 +8250,7 @@
     <p:bg>
       <p:bgPr>
         <a:solidFill>
-          <a:srgbClr val="121820"/>
+          <a:srgbClr val="1A1A1A"/>
         </a:solidFill>
       </p:bgPr>
     </p:bg>
@@ -8790,7 +8790,7 @@
               <a:buNone/>
               <a:defRPr lang="en-US" sz="4800" b="1" dirty="0">
                 <a:solidFill>
-                  <a:srgbClr val="121820"/>
+                  <a:srgbClr val="1A1A1A"/>
                 </a:solidFill>
                 <a:latin typeface="Calibri" pitchFamily="34" charset="0"/>
                 <a:ea typeface="Calibri" pitchFamily="34" charset="-122"/>
@@ -8805,7 +8805,7 @@
             <a:r>
               <a:rPr lang="en-US" sz="4800" b="1" dirty="0">
                 <a:solidFill>
-                  <a:srgbClr val="121820"/>
+                  <a:srgbClr val="1A1A1A"/>
                 </a:solidFill>
                 <a:latin typeface="Calibri" pitchFamily="34" charset="0"/>
                 <a:ea typeface="Calibri" pitchFamily="34" charset="-122"/>
@@ -9149,11 +9149,11 @@
             <a:avLst/>
           </a:prstGeom>
           <a:solidFill>
-            <a:srgbClr val="121820"/>
+            <a:srgbClr val="1A1A1A"/>
           </a:solidFill>
           <a:ln w="12700">
             <a:solidFill>
-              <a:srgbClr val="121820"/>
+              <a:srgbClr val="1A1A1A"/>
             </a:solidFill>
             <a:prstDash val="solid"/>
           </a:ln>
@@ -9238,7 +9238,7 @@
               <a:buNone/>
               <a:defRPr lang="en-US" sz="3600" b="1" dirty="0">
                 <a:solidFill>
-                  <a:srgbClr val="121820"/>
+                  <a:srgbClr val="1A1A1A"/>
                 </a:solidFill>
                 <a:latin typeface="Calibri" pitchFamily="34" charset="0"/>
                 <a:ea typeface="Calibri" pitchFamily="34" charset="-122"/>
@@ -9253,7 +9253,7 @@
             <a:r>
               <a:rPr lang="en-US" sz="3600" b="1" dirty="0">
                 <a:solidFill>
-                  <a:srgbClr val="121820"/>
+                  <a:srgbClr val="1A1A1A"/>
                 </a:solidFill>
                 <a:latin typeface="Calibri" pitchFamily="34" charset="0"/>
                 <a:ea typeface="Calibri" pitchFamily="34" charset="-122"/>
@@ -10033,7 +10033,7 @@
             <a:r>
               <a:rPr lang="en-US" sz="4800" b="1" dirty="0">
                 <a:solidFill>
-                  <a:srgbClr val="121820"/>
+                  <a:srgbClr val="1A1A1A"/>
                 </a:solidFill>
                 <a:latin typeface="Calibri" pitchFamily="34" charset="0"/>
                 <a:ea typeface="Calibri" pitchFamily="34" charset="-122"/>
@@ -10229,7 +10229,7 @@
             <a:r>
               <a:rPr lang="en-US" sz="4800" b="1" dirty="0">
                 <a:solidFill>
-                  <a:srgbClr val="121820"/>
+                  <a:srgbClr val="1A1A1A"/>
                 </a:solidFill>
                 <a:latin typeface="Calibri" pitchFamily="34" charset="0"/>
                 <a:ea typeface="Calibri" pitchFamily="34" charset="-122"/>
@@ -10466,7 +10466,7 @@
             <a:r>
               <a:rPr lang="en-US" sz="2800" b="1" dirty="0">
                 <a:solidFill>
-                  <a:srgbClr val="121820"/>
+                  <a:srgbClr val="1A1A1A"/>
                 </a:solidFill>
                 <a:latin typeface="Calibri" pitchFamily="34" charset="0"/>
                 <a:ea typeface="Calibri" pitchFamily="34" charset="-122"/>
@@ -10637,7 +10637,7 @@
             <a:r>
               <a:rPr lang="en-US" sz="2800" b="1" dirty="0">
                 <a:solidFill>
-                  <a:srgbClr val="121820"/>
+                  <a:srgbClr val="1A1A1A"/>
                 </a:solidFill>
                 <a:latin typeface="Calibri" pitchFamily="34" charset="0"/>
                 <a:ea typeface="Calibri" pitchFamily="34" charset="-122"/>
@@ -10682,7 +10682,7 @@
             <a:r>
               <a:rPr lang="en-US" sz="1600" dirty="0">
                 <a:solidFill>
-                  <a:srgbClr val="121820"/>
+                  <a:srgbClr val="1A1A1A"/>
                 </a:solidFill>
                 <a:latin typeface="Calibri" pitchFamily="34" charset="0"/>
                 <a:ea typeface="Calibri" pitchFamily="34" charset="-122"/>
@@ -10703,7 +10703,7 @@
             <a:r>
               <a:rPr lang="en-US" sz="1600" dirty="0">
                 <a:solidFill>
-                  <a:srgbClr val="121820"/>
+                  <a:srgbClr val="1A1A1A"/>
                 </a:solidFill>
                 <a:latin typeface="Calibri" pitchFamily="34" charset="0"/>
                 <a:ea typeface="Calibri" pitchFamily="34" charset="-122"/>
@@ -10724,7 +10724,7 @@
             <a:r>
               <a:rPr lang="en-US" sz="1600" dirty="0">
                 <a:solidFill>
-                  <a:srgbClr val="121820"/>
+                  <a:srgbClr val="1A1A1A"/>
                 </a:solidFill>
                 <a:latin typeface="Calibri" pitchFamily="34" charset="0"/>
                 <a:ea typeface="Calibri" pitchFamily="34" charset="-122"/>
@@ -10745,7 +10745,7 @@
             <a:r>
               <a:rPr lang="en-US" sz="1600" dirty="0">
                 <a:solidFill>
-                  <a:srgbClr val="121820"/>
+                  <a:srgbClr val="1A1A1A"/>
                 </a:solidFill>
                 <a:latin typeface="Calibri" pitchFamily="34" charset="0"/>
                 <a:ea typeface="Calibri" pitchFamily="34" charset="-122"/>
@@ -10900,7 +10900,7 @@
             <a:r>
               <a:rPr lang="en-US" sz="2800" b="1" dirty="0">
                 <a:solidFill>
-                  <a:srgbClr val="121820"/>
+                  <a:srgbClr val="1A1A1A"/>
                 </a:solidFill>
                 <a:latin typeface="Calibri" pitchFamily="34" charset="0"/>
                 <a:ea typeface="Calibri" pitchFamily="34" charset="-122"/>
@@ -10942,7 +10942,7 @@
             <a:r>
               <a:rPr lang="en-US" sz="1600" dirty="0">
                 <a:solidFill>
-                  <a:srgbClr val="121820"/>
+                  <a:srgbClr val="1A1A1A"/>
                 </a:solidFill>
                 <a:latin typeface="Calibri" pitchFamily="34" charset="0"/>
                 <a:ea typeface="Calibri" pitchFamily="34" charset="-122"/>
@@ -10972,7 +10972,7 @@
             <a:r>
               <a:rPr lang="en-US" sz="1600" dirty="0">
                 <a:solidFill>
-                  <a:srgbClr val="121820"/>
+                  <a:srgbClr val="1A1A1A"/>
                 </a:solidFill>
                 <a:latin typeface="Calibri" pitchFamily="34" charset="0"/>
                 <a:ea typeface="Calibri" pitchFamily="34" charset="-122"/>
@@ -10993,7 +10993,7 @@
             <a:r>
               <a:rPr lang="en-US" sz="1600" dirty="0">
                 <a:solidFill>
-                  <a:srgbClr val="121820"/>
+                  <a:srgbClr val="1A1A1A"/>
                 </a:solidFill>
                 <a:latin typeface="Calibri" pitchFamily="34" charset="0"/>
                 <a:ea typeface="Calibri" pitchFamily="34" charset="-122"/>
@@ -11014,7 +11014,7 @@
             <a:r>
               <a:rPr lang="en-US" sz="1600" dirty="0">
                 <a:solidFill>
-                  <a:srgbClr val="121820"/>
+                  <a:srgbClr val="1A1A1A"/>
                 </a:solidFill>
                 <a:latin typeface="Calibri" pitchFamily="34" charset="0"/>
                 <a:ea typeface="Calibri" pitchFamily="34" charset="-122"/>
@@ -11117,7 +11117,7 @@
             <a:r>
               <a:rPr lang="en-US" sz="1800" b="1" dirty="0">
                 <a:solidFill>
-                  <a:srgbClr val="121820"/>
+                  <a:srgbClr val="1A1A1A"/>
                 </a:solidFill>
                 <a:latin typeface="Calibri" pitchFamily="34" charset="0"/>
                 <a:ea typeface="Calibri" pitchFamily="34" charset="-122"/>
@@ -11345,7 +11345,7 @@
             <a:r>
               <a:rPr lang="en-US" sz="2800" b="1" dirty="0">
                 <a:solidFill>
-                  <a:srgbClr val="121820"/>
+                  <a:srgbClr val="1A1A1A"/>
                 </a:solidFill>
                 <a:latin typeface="Calibri" pitchFamily="34" charset="0"/>
                 <a:ea typeface="Calibri" pitchFamily="34" charset="-122"/>
@@ -11500,7 +11500,7 @@
             <a:r>
               <a:rPr lang="en-US" sz="2800" b="1" dirty="0">
                 <a:solidFill>
-                  <a:srgbClr val="121820"/>
+                  <a:srgbClr val="1A1A1A"/>
                 </a:solidFill>
                 <a:latin typeface="Calibri" pitchFamily="34" charset="0"/>
                 <a:ea typeface="Calibri" pitchFamily="34" charset="-122"/>
@@ -11545,7 +11545,7 @@
             <a:r>
               <a:rPr lang="en-US" sz="1600" dirty="0">
                 <a:solidFill>
-                  <a:srgbClr val="121820"/>
+                  <a:srgbClr val="1A1A1A"/>
                 </a:solidFill>
                 <a:latin typeface="Calibri" pitchFamily="34" charset="0"/>
                 <a:ea typeface="Calibri" pitchFamily="34" charset="-122"/>
@@ -11566,7 +11566,7 @@
             <a:r>
               <a:rPr lang="en-US" sz="1600" dirty="0">
                 <a:solidFill>
-                  <a:srgbClr val="121820"/>
+                  <a:srgbClr val="1A1A1A"/>
                 </a:solidFill>
                 <a:latin typeface="Calibri" pitchFamily="34" charset="0"/>
                 <a:ea typeface="Calibri" pitchFamily="34" charset="-122"/>
@@ -11587,7 +11587,7 @@
             <a:r>
               <a:rPr lang="en-US" sz="1600" dirty="0">
                 <a:solidFill>
-                  <a:srgbClr val="121820"/>
+                  <a:srgbClr val="1A1A1A"/>
                 </a:solidFill>
                 <a:latin typeface="Calibri" pitchFamily="34" charset="0"/>
                 <a:ea typeface="Calibri" pitchFamily="34" charset="-122"/>
@@ -11608,7 +11608,7 @@
             <a:r>
               <a:rPr lang="en-US" sz="1600" dirty="0">
                 <a:solidFill>
-                  <a:srgbClr val="121820"/>
+                  <a:srgbClr val="1A1A1A"/>
                 </a:solidFill>
                 <a:latin typeface="Calibri" pitchFamily="34" charset="0"/>
                 <a:ea typeface="Calibri" pitchFamily="34" charset="-122"/>
@@ -11763,7 +11763,7 @@
             <a:r>
               <a:rPr lang="en-US" sz="2800" b="1" dirty="0">
                 <a:solidFill>
-                  <a:srgbClr val="121820"/>
+                  <a:srgbClr val="1A1A1A"/>
                 </a:solidFill>
                 <a:latin typeface="Calibri" pitchFamily="34" charset="0"/>
                 <a:ea typeface="Calibri" pitchFamily="34" charset="-122"/>
@@ -11918,7 +11918,7 @@
             <a:r>
               <a:rPr lang="en-US" sz="2800" b="1" dirty="0">
                 <a:solidFill>
-                  <a:srgbClr val="121820"/>
+                  <a:srgbClr val="1A1A1A"/>
                 </a:solidFill>
                 <a:latin typeface="Calibri" pitchFamily="34" charset="0"/>
                 <a:ea typeface="Calibri" pitchFamily="34" charset="-122"/>
@@ -11963,7 +11963,7 @@
             <a:r>
               <a:rPr lang="en-US" sz="1600" dirty="0">
                 <a:solidFill>
-                  <a:srgbClr val="121820"/>
+                  <a:srgbClr val="1A1A1A"/>
                 </a:solidFill>
                 <a:latin typeface="Calibri" pitchFamily="34" charset="0"/>
                 <a:ea typeface="Calibri" pitchFamily="34" charset="-122"/>
@@ -11984,7 +11984,7 @@
             <a:r>
               <a:rPr lang="en-US" sz="1600" dirty="0">
                 <a:solidFill>
-                  <a:srgbClr val="121820"/>
+                  <a:srgbClr val="1A1A1A"/>
                 </a:solidFill>
                 <a:latin typeface="Calibri" pitchFamily="34" charset="0"/>
                 <a:ea typeface="Calibri" pitchFamily="34" charset="-122"/>
@@ -12005,7 +12005,7 @@
             <a:r>
               <a:rPr lang="en-US" sz="1600" dirty="0">
                 <a:solidFill>
-                  <a:srgbClr val="121820"/>
+                  <a:srgbClr val="1A1A1A"/>
                 </a:solidFill>
                 <a:latin typeface="Calibri" pitchFamily="34" charset="0"/>
                 <a:ea typeface="Calibri" pitchFamily="34" charset="-122"/>
@@ -12026,7 +12026,7 @@
             <a:r>
               <a:rPr lang="en-US" sz="1600" dirty="0">
                 <a:solidFill>
-                  <a:srgbClr val="121820"/>
+                  <a:srgbClr val="1A1A1A"/>
                 </a:solidFill>
                 <a:latin typeface="Calibri" pitchFamily="34" charset="0"/>
                 <a:ea typeface="Calibri" pitchFamily="34" charset="-122"/>
@@ -12181,7 +12181,7 @@
             <a:r>
               <a:rPr lang="en-US" sz="2800" b="1" dirty="0">
                 <a:solidFill>
-                  <a:srgbClr val="121820"/>
+                  <a:srgbClr val="1A1A1A"/>
                 </a:solidFill>
                 <a:latin typeface="Calibri" pitchFamily="34" charset="0"/>
                 <a:ea typeface="Calibri" pitchFamily="34" charset="-122"/>
@@ -12336,7 +12336,7 @@
             <a:r>
               <a:rPr lang="en-US" sz="3600" b="1" dirty="0">
                 <a:solidFill>
-                  <a:srgbClr val="121820"/>
+                  <a:srgbClr val="1A1A1A"/>
                 </a:solidFill>
                 <a:latin typeface="Calibri" pitchFamily="34" charset="0"/>
                 <a:ea typeface="Calibri" pitchFamily="34" charset="-122"/>
@@ -12566,7 +12566,7 @@
             <a:r>
               <a:rPr lang="en-US" sz="2800" b="1" dirty="0">
                 <a:solidFill>
-                  <a:srgbClr val="121820"/>
+                  <a:srgbClr val="1A1A1A"/>
                 </a:solidFill>
                 <a:latin typeface="Calibri" pitchFamily="34" charset="0"/>
                 <a:ea typeface="Calibri" pitchFamily="34" charset="-122"/>
@@ -12611,7 +12611,7 @@
             <a:r>
               <a:rPr lang="en-US" sz="1600" dirty="0">
                 <a:solidFill>
-                  <a:srgbClr val="121820"/>
+                  <a:srgbClr val="1A1A1A"/>
                 </a:solidFill>
                 <a:latin typeface="Calibri" pitchFamily="34" charset="0"/>
                 <a:ea typeface="Calibri" pitchFamily="34" charset="-122"/>
@@ -12632,7 +12632,7 @@
             <a:r>
               <a:rPr lang="en-US" sz="1600" dirty="0">
                 <a:solidFill>
-                  <a:srgbClr val="121820"/>
+                  <a:srgbClr val="1A1A1A"/>
                 </a:solidFill>
                 <a:latin typeface="Calibri" pitchFamily="34" charset="0"/>
                 <a:ea typeface="Calibri" pitchFamily="34" charset="-122"/>
@@ -12653,7 +12653,7 @@
             <a:r>
               <a:rPr lang="en-US" sz="1600" dirty="0">
                 <a:solidFill>
-                  <a:srgbClr val="121820"/>
+                  <a:srgbClr val="1A1A1A"/>
                 </a:solidFill>
                 <a:latin typeface="Calibri" pitchFamily="34" charset="0"/>
                 <a:ea typeface="Calibri" pitchFamily="34" charset="-122"/>
@@ -12674,7 +12674,7 @@
             <a:r>
               <a:rPr lang="en-US" sz="1600" dirty="0">
                 <a:solidFill>
-                  <a:srgbClr val="121820"/>
+                  <a:srgbClr val="1A1A1A"/>
                 </a:solidFill>
                 <a:latin typeface="Calibri" pitchFamily="34" charset="0"/>
                 <a:ea typeface="Calibri" pitchFamily="34" charset="-122"/>
@@ -13708,7 +13708,7 @@
             <a:r>
               <a:rPr lang="en-US" sz="4800" b="1" dirty="0">
                 <a:solidFill>
-                  <a:srgbClr val="121820"/>
+                  <a:srgbClr val="1A1A1A"/>
                 </a:solidFill>
                 <a:latin typeface="Calibri" pitchFamily="34" charset="0"/>
                 <a:ea typeface="Calibri" pitchFamily="34" charset="-122"/>
@@ -13945,7 +13945,7 @@
             <a:r>
               <a:rPr lang="en-US" sz="3600" b="1" dirty="0">
                 <a:solidFill>
-                  <a:srgbClr val="121820"/>
+                  <a:srgbClr val="1A1A1A"/>
                 </a:solidFill>
                 <a:latin typeface="Calibri" pitchFamily="34" charset="0"/>
                 <a:ea typeface="Calibri" pitchFamily="34" charset="-122"/>
@@ -14100,7 +14100,7 @@
             <a:r>
               <a:rPr lang="en-US" sz="4800" b="1" dirty="0">
                 <a:solidFill>
-                  <a:srgbClr val="121820"/>
+                  <a:srgbClr val="1A1A1A"/>
                 </a:solidFill>
                 <a:latin typeface="Calibri" pitchFamily="34" charset="0"/>
                 <a:ea typeface="Calibri" pitchFamily="34" charset="-122"/>

--- a/presentation/CTS Presentation Template.pptx
+++ b/presentation/CTS Presentation Template.pptx
@@ -1105,7 +1105,7 @@
           <a:p>
             <a:r>
               <a:rPr lang="en-US" dirty="0"/>
-              <a:t>CTS Cover (dark). Black background, CTS Seamless AV logo, the three division colours as the motif.</a:t>
+              <a:t>CTS Cover (dark). Charcoal background, CTS Seamless AV logo, the three division colours as the motif.</a:t>
             </a:r>
             <a:endParaRPr lang="en-US" dirty="0"/>
           </a:p>
@@ -2073,7 +2073,7 @@
           <a:p>
             <a:r>
               <a:rPr lang="en-US" dirty="0"/>
-              <a:t>CTS Cover (light). White with a black panel.</a:t>
+              <a:t>CTS Cover (light). White with a charcoal panel.</a:t>
             </a:r>
             <a:endParaRPr lang="en-US" dirty="0"/>
           </a:p>
@@ -2337,7 +2337,7 @@
           <a:p>
             <a:r>
               <a:rPr lang="en-US" dirty="0"/>
-              <a:t>CTS Production cover. Black background with the Production lock-up and mint and teal circles.</a:t>
+              <a:t>CTS Production cover. Charcoal background with the Production lock-up and mint and teal circles.</a:t>
             </a:r>
             <a:endParaRPr lang="en-US" dirty="0"/>
           </a:p>
@@ -2425,7 +2425,7 @@
           <a:p>
             <a:r>
               <a:rPr lang="en-US" dirty="0"/>
-              <a:t>CTS Consulting cover. Black background with the Consulting lock-up and lavender and navy circles.</a:t>
+              <a:t>CTS Consulting cover. Charcoal background with the Consulting lock-up and lavender and navy circles.</a:t>
             </a:r>
             <a:endParaRPr lang="en-US" dirty="0"/>
           </a:p>
@@ -2513,7 +2513,7 @@
           <a:p>
             <a:r>
               <a:rPr lang="en-US" dirty="0"/>
-              <a:t>CTS Support cover. Black background with the Support lock-up and rose and burgundy circles.</a:t>
+              <a:t>CTS Support cover. Charcoal background with the Support lock-up and rose and burgundy circles.</a:t>
             </a:r>
             <a:endParaRPr lang="en-US" dirty="0"/>
           </a:p>
